--- a/论文图片/图片转pdf/第三章/融合扫视时序特征的多维视觉感知模型.pptx
+++ b/论文图片/图片转pdf/第三章/融合扫视时序特征的多维视觉感知模型.pptx
@@ -107,12 +107,12 @@
   <p:extLst>
     <p:ext uri="{EFAFB233-063F-42B5-8137-9DF3F51BA10A}">
       <p15:sldGuideLst xmlns:p15="http://schemas.microsoft.com/office/powerpoint/2012/main">
-        <p15:guide id="1" orient="horz" pos="1831" userDrawn="1">
+        <p15:guide id="1" orient="horz" pos="1804" userDrawn="1">
           <p15:clr>
             <a:srgbClr val="A4A3A4"/>
           </p15:clr>
         </p15:guide>
-        <p15:guide id="2" pos="2910" userDrawn="1">
+        <p15:guide id="2" pos="2899" userDrawn="1">
           <p15:clr>
             <a:srgbClr val="A4A3A4"/>
           </p15:clr>
@@ -2930,1260 +2930,1282 @@
         <p:nvPr/>
       </p:nvGrpSpPr>
       <p:grpSpPr/>
-      <p:grpSp>
-        <p:nvGrpSpPr>
-          <p:cNvPr id="19" name="组合 18"/>
-          <p:cNvGrpSpPr/>
+      <p:sp>
+        <p:nvSpPr>
+          <p:cNvPr id="16" name="矩形 15"/>
+          <p:cNvSpPr/>
           <p:nvPr/>
-        </p:nvGrpSpPr>
-        <p:grpSpPr>
+        </p:nvSpPr>
+        <p:spPr>
           <a:xfrm>
-            <a:off x="109905" y="110130"/>
-            <a:ext cx="9020175" cy="5594985"/>
-            <a:chOff x="1829" y="772"/>
-            <a:chExt cx="14205" cy="8811"/>
+            <a:off x="125730" y="732790"/>
+            <a:ext cx="2447925" cy="4782185"/>
           </a:xfrm>
-        </p:grpSpPr>
-        <p:sp>
-          <p:nvSpPr>
-            <p:cNvPr id="16" name="矩形 15"/>
-            <p:cNvSpPr/>
-            <p:nvPr/>
-          </p:nvSpPr>
-          <p:spPr>
-            <a:xfrm>
-              <a:off x="1830" y="1657"/>
-              <a:ext cx="3855" cy="7927"/>
-            </a:xfrm>
-            <a:prstGeom prst="rect">
-              <a:avLst/>
-            </a:prstGeom>
+          <a:prstGeom prst="rect">
+            <a:avLst/>
+          </a:prstGeom>
+          <a:solidFill>
+            <a:srgbClr val="FBEDE0"/>
+          </a:solidFill>
+          <a:ln>
             <a:solidFill>
-              <a:srgbClr val="FBEDE0"/>
+              <a:schemeClr val="tx1"/>
             </a:solidFill>
-            <a:ln>
+          </a:ln>
+        </p:spPr>
+        <p:style>
+          <a:lnRef idx="2">
+            <a:schemeClr val="accent1">
+              <a:lumMod val="75000"/>
+            </a:schemeClr>
+          </a:lnRef>
+          <a:fillRef idx="1">
+            <a:schemeClr val="accent1"/>
+          </a:fillRef>
+          <a:effectRef idx="0">
+            <a:srgbClr val="FFFFFF"/>
+          </a:effectRef>
+          <a:fontRef idx="minor">
+            <a:schemeClr val="lt1"/>
+          </a:fontRef>
+        </p:style>
+        <p:txBody>
+          <a:bodyPr rtlCol="0" anchor="ctr"/>
+          <a:p>
+            <a:pPr algn="ctr"/>
+            <a:endParaRPr lang="zh-CN" altLang="en-US" sz="1400"/>
+          </a:p>
+        </p:txBody>
+      </p:sp>
+      <p:sp>
+        <p:nvSpPr>
+          <p:cNvPr id="13" name="矩形 12"/>
+          <p:cNvSpPr/>
+          <p:nvPr/>
+        </p:nvSpPr>
+        <p:spPr>
+          <a:xfrm>
+            <a:off x="125095" y="170815"/>
+            <a:ext cx="2449195" cy="561975"/>
+          </a:xfrm>
+          <a:prstGeom prst="rect">
+            <a:avLst/>
+          </a:prstGeom>
+          <a:solidFill>
+            <a:srgbClr val="F7CAAB"/>
+          </a:solidFill>
+          <a:ln>
+            <a:solidFill>
+              <a:schemeClr val="tx1"/>
+            </a:solidFill>
+          </a:ln>
+        </p:spPr>
+        <p:style>
+          <a:lnRef idx="2">
+            <a:schemeClr val="accent1">
+              <a:lumMod val="75000"/>
+            </a:schemeClr>
+          </a:lnRef>
+          <a:fillRef idx="1">
+            <a:schemeClr val="accent1"/>
+          </a:fillRef>
+          <a:effectRef idx="0">
+            <a:srgbClr val="FFFFFF"/>
+          </a:effectRef>
+          <a:fontRef idx="minor">
+            <a:schemeClr val="lt1"/>
+          </a:fontRef>
+        </p:style>
+        <p:txBody>
+          <a:bodyPr rtlCol="0" anchor="ctr"/>
+          <a:p>
+            <a:pPr algn="ctr"/>
+            <a:r>
+              <a:rPr lang="en-US" altLang="zh-CN" sz="1600">
+                <a:solidFill>
+                  <a:schemeClr val="tx1"/>
+                </a:solidFill>
+                <a:latin typeface="Times New Roman" panose="02020603050405020304" charset="0"/>
+                <a:ea typeface="宋体" panose="02010600030101010101" pitchFamily="2" charset="-122"/>
+                <a:cs typeface="Times New Roman" panose="02020603050405020304" charset="0"/>
+                <a:sym typeface="+mn-ea"/>
+              </a:rPr>
+              <a:t>castleCSF-TS</a:t>
+            </a:r>
+            <a:endParaRPr lang="zh-CN" altLang="en-US" sz="1600">
               <a:solidFill>
                 <a:schemeClr val="tx1"/>
               </a:solidFill>
-            </a:ln>
-          </p:spPr>
-          <p:style>
-            <a:lnRef idx="2">
-              <a:schemeClr val="accent1">
-                <a:lumMod val="75000"/>
-              </a:schemeClr>
-            </a:lnRef>
-            <a:fillRef idx="1">
-              <a:schemeClr val="accent1"/>
-            </a:fillRef>
-            <a:effectRef idx="0">
-              <a:srgbClr val="FFFFFF"/>
-            </a:effectRef>
-            <a:fontRef idx="minor">
-              <a:schemeClr val="lt1"/>
-            </a:fontRef>
-          </p:style>
-          <p:txBody>
-            <a:bodyPr rtlCol="0" anchor="ctr"/>
-            <a:p>
-              <a:pPr algn="ctr"/>
-              <a:endParaRPr lang="zh-CN" altLang="en-US" sz="1400"/>
-            </a:p>
-          </p:txBody>
-        </p:sp>
-        <p:sp>
-          <p:nvSpPr>
-            <p:cNvPr id="13" name="矩形 12"/>
-            <p:cNvSpPr/>
-            <p:nvPr/>
-          </p:nvSpPr>
-          <p:spPr>
-            <a:xfrm>
-              <a:off x="1829" y="772"/>
-              <a:ext cx="3857" cy="885"/>
-            </a:xfrm>
-            <a:prstGeom prst="rect">
-              <a:avLst/>
-            </a:prstGeom>
+              <a:latin typeface="Times New Roman" panose="02020603050405020304" charset="0"/>
+              <a:ea typeface="宋体" panose="02010600030101010101" pitchFamily="2" charset="-122"/>
+              <a:cs typeface="Times New Roman" panose="02020603050405020304" charset="0"/>
+              <a:sym typeface="+mn-ea"/>
+            </a:endParaRPr>
+          </a:p>
+        </p:txBody>
+      </p:sp>
+      <p:sp>
+        <p:nvSpPr>
+          <p:cNvPr id="4" name="圆角矩形 3"/>
+          <p:cNvSpPr/>
+          <p:nvPr/>
+        </p:nvSpPr>
+        <p:spPr>
+          <a:xfrm>
+            <a:off x="333375" y="1228725"/>
+            <a:ext cx="2016760" cy="359410"/>
+          </a:xfrm>
+          <a:prstGeom prst="roundRect">
+            <a:avLst>
+              <a:gd name="adj" fmla="val 5430"/>
+            </a:avLst>
+          </a:prstGeom>
+          <a:noFill/>
+          <a:ln>
             <a:solidFill>
-              <a:srgbClr val="F7CAAB"/>
+              <a:schemeClr val="tx1"/>
             </a:solidFill>
-            <a:ln>
-              <a:solidFill>
-                <a:schemeClr val="tx1"/>
-              </a:solidFill>
-            </a:ln>
-          </p:spPr>
-          <p:style>
-            <a:lnRef idx="2">
-              <a:schemeClr val="accent1">
-                <a:lumMod val="75000"/>
-              </a:schemeClr>
-            </a:lnRef>
-            <a:fillRef idx="1">
-              <a:schemeClr val="accent1"/>
-            </a:fillRef>
-            <a:effectRef idx="0">
-              <a:srgbClr val="FFFFFF"/>
-            </a:effectRef>
-            <a:fontRef idx="minor">
-              <a:schemeClr val="lt1"/>
-            </a:fontRef>
-          </p:style>
-          <p:txBody>
-            <a:bodyPr rtlCol="0" anchor="ctr"/>
-            <a:p>
-              <a:pPr algn="ctr"/>
-              <a:r>
-                <a:rPr lang="en-US" altLang="zh-CN" sz="1600" b="1">
-                  <a:solidFill>
-                    <a:schemeClr val="tx1"/>
-                  </a:solidFill>
-                  <a:latin typeface="Times New Roman" panose="02020603050405020304" charset="0"/>
-                  <a:ea typeface="宋体" panose="02010600030101010101" pitchFamily="2" charset="-122"/>
-                  <a:cs typeface="Times New Roman" panose="02020603050405020304" charset="0"/>
-                  <a:sym typeface="+mn-ea"/>
-                </a:rPr>
-                <a:t>castleCSF-TS</a:t>
-              </a:r>
-              <a:endParaRPr lang="zh-CN" altLang="en-US" sz="1600" b="1">
+          </a:ln>
+          <a:extLst>
+            <a:ext uri="{909E8E84-426E-40DD-AFC4-6F175D3DCCD1}">
+              <a14:hiddenFill xmlns:a14="http://schemas.microsoft.com/office/drawing/2010/main">
                 <a:solidFill>
-                  <a:schemeClr val="tx1"/>
+                  <a:srgbClr val="FBEDE0"/>
                 </a:solidFill>
+              </a14:hiddenFill>
+            </a:ext>
+          </a:extLst>
+        </p:spPr>
+        <p:style>
+          <a:lnRef idx="2">
+            <a:schemeClr val="accent1"/>
+          </a:lnRef>
+          <a:fillRef idx="0">
+            <a:srgbClr val="FFFFFF"/>
+          </a:fillRef>
+          <a:effectRef idx="0">
+            <a:srgbClr val="FFFFFF"/>
+          </a:effectRef>
+          <a:fontRef idx="minor">
+            <a:schemeClr val="tx1"/>
+          </a:fontRef>
+        </p:style>
+        <p:txBody>
+          <a:bodyPr rtlCol="0" anchor="ctr"/>
+          <a:p>
+            <a:pPr algn="ctr"/>
+            <a:r>
+              <a:rPr lang="zh-CN" altLang="en-US" sz="1400">
                 <a:latin typeface="宋体" panose="02010600030101010101" pitchFamily="2" charset="-122"/>
                 <a:ea typeface="宋体" panose="02010600030101010101" pitchFamily="2" charset="-122"/>
-                <a:cs typeface="宋体" panose="02010600030101010101" pitchFamily="2" charset="-122"/>
-              </a:endParaRPr>
-            </a:p>
-          </p:txBody>
-        </p:sp>
-        <p:sp>
-          <p:nvSpPr>
-            <p:cNvPr id="4" name="圆角矩形 3"/>
-            <p:cNvSpPr/>
-            <p:nvPr/>
-          </p:nvSpPr>
-          <p:spPr>
-            <a:xfrm>
-              <a:off x="2481" y="1970"/>
-              <a:ext cx="2639" cy="721"/>
-            </a:xfrm>
-            <a:prstGeom prst="roundRect">
-              <a:avLst>
-                <a:gd name="adj" fmla="val 5430"/>
-              </a:avLst>
-            </a:prstGeom>
-            <a:noFill/>
-            <a:ln>
-              <a:solidFill>
-                <a:schemeClr val="tx1"/>
-              </a:solidFill>
-            </a:ln>
-            <a:extLst>
-              <a:ext uri="{909E8E84-426E-40DD-AFC4-6F175D3DCCD1}">
-                <a14:hiddenFill xmlns:a14="http://schemas.microsoft.com/office/drawing/2010/main">
-                  <a:solidFill>
-                    <a:srgbClr val="FBEDE0"/>
-                  </a:solidFill>
-                </a14:hiddenFill>
-              </a:ext>
-            </a:extLst>
-          </p:spPr>
-          <p:style>
-            <a:lnRef idx="2">
-              <a:schemeClr val="accent1"/>
-            </a:lnRef>
-            <a:fillRef idx="0">
-              <a:srgbClr val="FFFFFF"/>
-            </a:fillRef>
-            <a:effectRef idx="0">
-              <a:srgbClr val="FFFFFF"/>
-            </a:effectRef>
-            <a:fontRef idx="minor">
-              <a:schemeClr val="tx1"/>
-            </a:fontRef>
-          </p:style>
-          <p:txBody>
-            <a:bodyPr rtlCol="0" anchor="ctr"/>
-            <a:p>
-              <a:pPr algn="ctr"/>
-              <a:r>
-                <a:rPr lang="zh-CN" altLang="en-US" sz="1400" b="1">
-                  <a:latin typeface="宋体" panose="02010600030101010101" pitchFamily="2" charset="-122"/>
-                  <a:ea typeface="宋体" panose="02010600030101010101" pitchFamily="2" charset="-122"/>
-                </a:rPr>
-                <a:t>亮度</a:t>
-              </a:r>
-              <a:r>
-                <a:rPr lang="en-US" altLang="zh-CN" sz="1400" b="1">
-                  <a:latin typeface="宋体" panose="02010600030101010101" pitchFamily="2" charset="-122"/>
-                  <a:ea typeface="宋体" panose="02010600030101010101" pitchFamily="2" charset="-122"/>
-                </a:rPr>
-                <a:t> </a:t>
-              </a:r>
-              <a:endParaRPr lang="en-US" altLang="zh-CN" sz="1400" b="1">
+              </a:rPr>
+              <a:t>亮度</a:t>
+            </a:r>
+            <a:r>
+              <a:rPr lang="en-US" altLang="zh-CN" sz="1400">
                 <a:latin typeface="宋体" panose="02010600030101010101" pitchFamily="2" charset="-122"/>
                 <a:ea typeface="宋体" panose="02010600030101010101" pitchFamily="2" charset="-122"/>
-              </a:endParaRPr>
-            </a:p>
-            <a:p>
-              <a:pPr algn="ctr"/>
-              <a:r>
-                <a:rPr lang="en-US" altLang="zh-CN" sz="1400" b="1">
-                  <a:latin typeface="Times New Roman" panose="02020603050405020304" charset="0"/>
-                  <a:ea typeface="宋体" panose="02010600030101010101" pitchFamily="2" charset="-122"/>
-                  <a:cs typeface="Times New Roman" panose="02020603050405020304" charset="0"/>
-                </a:rPr>
-                <a:t>Luminance </a:t>
-              </a:r>
-              <a:endParaRPr lang="en-US" altLang="zh-CN" sz="1400" b="1">
+              </a:rPr>
+              <a:t> </a:t>
+            </a:r>
+            <a:r>
+              <a:rPr lang="en-US" altLang="zh-CN" sz="1400">
                 <a:latin typeface="Times New Roman" panose="02020603050405020304" charset="0"/>
                 <a:ea typeface="宋体" panose="02010600030101010101" pitchFamily="2" charset="-122"/>
                 <a:cs typeface="Times New Roman" panose="02020603050405020304" charset="0"/>
-              </a:endParaRPr>
-            </a:p>
-          </p:txBody>
-        </p:sp>
-        <p:sp>
-          <p:nvSpPr>
-            <p:cNvPr id="6" name="圆角矩形 5"/>
-            <p:cNvSpPr/>
-            <p:nvPr/>
-          </p:nvSpPr>
-          <p:spPr>
-            <a:xfrm>
-              <a:off x="2481" y="2997"/>
-              <a:ext cx="2639" cy="721"/>
-            </a:xfrm>
-            <a:prstGeom prst="roundRect">
-              <a:avLst>
-                <a:gd name="adj" fmla="val 5430"/>
-              </a:avLst>
-            </a:prstGeom>
-            <a:noFill/>
-            <a:ln>
-              <a:solidFill>
-                <a:schemeClr val="tx1"/>
-              </a:solidFill>
-            </a:ln>
-            <a:extLst>
-              <a:ext uri="{909E8E84-426E-40DD-AFC4-6F175D3DCCD1}">
-                <a14:hiddenFill xmlns:a14="http://schemas.microsoft.com/office/drawing/2010/main">
-                  <a:solidFill>
-                    <a:srgbClr val="FBEDE0"/>
-                  </a:solidFill>
-                </a14:hiddenFill>
-              </a:ext>
-            </a:extLst>
-          </p:spPr>
-          <p:style>
-            <a:lnRef idx="2">
-              <a:schemeClr val="accent1"/>
-            </a:lnRef>
-            <a:fillRef idx="0">
-              <a:srgbClr val="FFFFFF"/>
-            </a:fillRef>
-            <a:effectRef idx="0">
-              <a:srgbClr val="FFFFFF"/>
-            </a:effectRef>
-            <a:fontRef idx="minor">
+              </a:rPr>
+              <a:t>Luminance </a:t>
+            </a:r>
+            <a:endParaRPr lang="en-US" altLang="zh-CN" sz="1400">
+              <a:latin typeface="Times New Roman" panose="02020603050405020304" charset="0"/>
+              <a:ea typeface="宋体" panose="02010600030101010101" pitchFamily="2" charset="-122"/>
+              <a:cs typeface="Times New Roman" panose="02020603050405020304" charset="0"/>
+            </a:endParaRPr>
+          </a:p>
+        </p:txBody>
+      </p:sp>
+      <p:sp>
+        <p:nvSpPr>
+          <p:cNvPr id="6" name="圆角矩形 5"/>
+          <p:cNvSpPr/>
+          <p:nvPr/>
+        </p:nvSpPr>
+        <p:spPr>
+          <a:xfrm>
+            <a:off x="333375" y="1774190"/>
+            <a:ext cx="2016000" cy="360000"/>
+          </a:xfrm>
+          <a:prstGeom prst="roundRect">
+            <a:avLst>
+              <a:gd name="adj" fmla="val 5430"/>
+            </a:avLst>
+          </a:prstGeom>
+          <a:noFill/>
+          <a:ln>
+            <a:solidFill>
               <a:schemeClr val="tx1"/>
-            </a:fontRef>
-          </p:style>
-          <p:txBody>
-            <a:bodyPr rtlCol="0" anchor="ctr"/>
-            <a:p>
-              <a:pPr algn="ctr"/>
-              <a:r>
-                <a:rPr lang="zh-CN" altLang="en-US" sz="1400" b="1">
-                  <a:latin typeface="宋体" panose="02010600030101010101" pitchFamily="2" charset="-122"/>
-                  <a:ea typeface="宋体" panose="02010600030101010101" pitchFamily="2" charset="-122"/>
-                </a:rPr>
-                <a:t>色彩</a:t>
-              </a:r>
-              <a:r>
-                <a:rPr lang="en-US" altLang="zh-CN" sz="1400" b="1">
-                  <a:latin typeface="宋体" panose="02010600030101010101" pitchFamily="2" charset="-122"/>
-                  <a:ea typeface="宋体" panose="02010600030101010101" pitchFamily="2" charset="-122"/>
-                </a:rPr>
-                <a:t> </a:t>
-              </a:r>
-              <a:endParaRPr lang="en-US" altLang="zh-CN" sz="1400" b="1">
+            </a:solidFill>
+          </a:ln>
+          <a:extLst>
+            <a:ext uri="{909E8E84-426E-40DD-AFC4-6F175D3DCCD1}">
+              <a14:hiddenFill xmlns:a14="http://schemas.microsoft.com/office/drawing/2010/main">
+                <a:solidFill>
+                  <a:srgbClr val="FBEDE0"/>
+                </a:solidFill>
+              </a14:hiddenFill>
+            </a:ext>
+          </a:extLst>
+        </p:spPr>
+        <p:style>
+          <a:lnRef idx="2">
+            <a:schemeClr val="accent1"/>
+          </a:lnRef>
+          <a:fillRef idx="0">
+            <a:srgbClr val="FFFFFF"/>
+          </a:fillRef>
+          <a:effectRef idx="0">
+            <a:srgbClr val="FFFFFF"/>
+          </a:effectRef>
+          <a:fontRef idx="minor">
+            <a:schemeClr val="tx1"/>
+          </a:fontRef>
+        </p:style>
+        <p:txBody>
+          <a:bodyPr rtlCol="0" anchor="ctr"/>
+          <a:p>
+            <a:pPr algn="ctr"/>
+            <a:r>
+              <a:rPr lang="zh-CN" altLang="en-US" sz="1400">
                 <a:latin typeface="宋体" panose="02010600030101010101" pitchFamily="2" charset="-122"/>
                 <a:ea typeface="宋体" panose="02010600030101010101" pitchFamily="2" charset="-122"/>
-              </a:endParaRPr>
-            </a:p>
-            <a:p>
-              <a:pPr algn="ctr"/>
-              <a:r>
-                <a:rPr lang="en-US" altLang="zh-CN" sz="1400" b="1">
-                  <a:latin typeface="Times New Roman" panose="02020603050405020304" charset="0"/>
-                  <a:ea typeface="宋体" panose="02010600030101010101" pitchFamily="2" charset="-122"/>
-                  <a:cs typeface="Times New Roman" panose="02020603050405020304" charset="0"/>
-                </a:rPr>
-                <a:t>Color </a:t>
-              </a:r>
-              <a:endParaRPr lang="en-US" altLang="zh-CN" sz="1400" b="1">
+              </a:rPr>
+              <a:t>色彩</a:t>
+            </a:r>
+            <a:r>
+              <a:rPr lang="en-US" altLang="zh-CN" sz="1400">
+                <a:latin typeface="宋体" panose="02010600030101010101" pitchFamily="2" charset="-122"/>
+                <a:ea typeface="宋体" panose="02010600030101010101" pitchFamily="2" charset="-122"/>
+              </a:rPr>
+              <a:t> </a:t>
+            </a:r>
+            <a:r>
+              <a:rPr lang="en-US" altLang="zh-CN" sz="1400">
                 <a:latin typeface="Times New Roman" panose="02020603050405020304" charset="0"/>
                 <a:ea typeface="宋体" panose="02010600030101010101" pitchFamily="2" charset="-122"/>
                 <a:cs typeface="Times New Roman" panose="02020603050405020304" charset="0"/>
-              </a:endParaRPr>
-            </a:p>
-          </p:txBody>
-        </p:sp>
-        <p:sp>
-          <p:nvSpPr>
-            <p:cNvPr id="7" name="圆角矩形 6"/>
-            <p:cNvSpPr/>
-            <p:nvPr/>
-          </p:nvSpPr>
-          <p:spPr>
-            <a:xfrm>
-              <a:off x="2481" y="4024"/>
-              <a:ext cx="2639" cy="721"/>
-            </a:xfrm>
-            <a:prstGeom prst="roundRect">
-              <a:avLst>
-                <a:gd name="adj" fmla="val 5430"/>
-              </a:avLst>
-            </a:prstGeom>
-            <a:noFill/>
-            <a:ln>
-              <a:solidFill>
-                <a:schemeClr val="tx1"/>
-              </a:solidFill>
-            </a:ln>
-            <a:extLst>
-              <a:ext uri="{909E8E84-426E-40DD-AFC4-6F175D3DCCD1}">
-                <a14:hiddenFill xmlns:a14="http://schemas.microsoft.com/office/drawing/2010/main">
-                  <a:solidFill>
-                    <a:srgbClr val="FBEDE0"/>
-                  </a:solidFill>
-                </a14:hiddenFill>
-              </a:ext>
-            </a:extLst>
-          </p:spPr>
-          <p:style>
-            <a:lnRef idx="2">
-              <a:schemeClr val="accent1"/>
-            </a:lnRef>
-            <a:fillRef idx="0">
-              <a:srgbClr val="FFFFFF"/>
-            </a:fillRef>
-            <a:effectRef idx="0">
-              <a:srgbClr val="FFFFFF"/>
-            </a:effectRef>
-            <a:fontRef idx="minor">
+              </a:rPr>
+              <a:t>Color </a:t>
+            </a:r>
+            <a:endParaRPr lang="en-US" altLang="zh-CN" sz="1400">
+              <a:latin typeface="Times New Roman" panose="02020603050405020304" charset="0"/>
+              <a:ea typeface="宋体" panose="02010600030101010101" pitchFamily="2" charset="-122"/>
+              <a:cs typeface="Times New Roman" panose="02020603050405020304" charset="0"/>
+            </a:endParaRPr>
+          </a:p>
+        </p:txBody>
+      </p:sp>
+      <p:sp>
+        <p:nvSpPr>
+          <p:cNvPr id="7" name="圆角矩形 6"/>
+          <p:cNvSpPr/>
+          <p:nvPr/>
+        </p:nvSpPr>
+        <p:spPr>
+          <a:xfrm>
+            <a:off x="333375" y="2320290"/>
+            <a:ext cx="2016000" cy="360000"/>
+          </a:xfrm>
+          <a:prstGeom prst="roundRect">
+            <a:avLst>
+              <a:gd name="adj" fmla="val 5430"/>
+            </a:avLst>
+          </a:prstGeom>
+          <a:noFill/>
+          <a:ln>
+            <a:solidFill>
               <a:schemeClr val="tx1"/>
-            </a:fontRef>
-          </p:style>
-          <p:txBody>
-            <a:bodyPr rtlCol="0" anchor="ctr"/>
-            <a:p>
-              <a:pPr algn="ctr"/>
-              <a:r>
-                <a:rPr lang="zh-CN" altLang="en-US" sz="1400" b="1">
-                  <a:latin typeface="宋体" panose="02010600030101010101" pitchFamily="2" charset="-122"/>
-                  <a:ea typeface="宋体" panose="02010600030101010101" pitchFamily="2" charset="-122"/>
-                </a:rPr>
-                <a:t>空间频率</a:t>
-              </a:r>
-              <a:r>
-                <a:rPr lang="en-US" altLang="zh-CN" sz="1400" b="1">
-                  <a:latin typeface="宋体" panose="02010600030101010101" pitchFamily="2" charset="-122"/>
-                  <a:ea typeface="宋体" panose="02010600030101010101" pitchFamily="2" charset="-122"/>
-                </a:rPr>
-                <a:t> </a:t>
-              </a:r>
-              <a:endParaRPr lang="en-US" altLang="zh-CN" sz="1400" b="1">
+            </a:solidFill>
+          </a:ln>
+          <a:extLst>
+            <a:ext uri="{909E8E84-426E-40DD-AFC4-6F175D3DCCD1}">
+              <a14:hiddenFill xmlns:a14="http://schemas.microsoft.com/office/drawing/2010/main">
+                <a:solidFill>
+                  <a:srgbClr val="FBEDE0"/>
+                </a:solidFill>
+              </a14:hiddenFill>
+            </a:ext>
+          </a:extLst>
+        </p:spPr>
+        <p:style>
+          <a:lnRef idx="2">
+            <a:schemeClr val="accent1"/>
+          </a:lnRef>
+          <a:fillRef idx="0">
+            <a:srgbClr val="FFFFFF"/>
+          </a:fillRef>
+          <a:effectRef idx="0">
+            <a:srgbClr val="FFFFFF"/>
+          </a:effectRef>
+          <a:fontRef idx="minor">
+            <a:schemeClr val="tx1"/>
+          </a:fontRef>
+        </p:style>
+        <p:txBody>
+          <a:bodyPr rtlCol="0" anchor="ctr"/>
+          <a:p>
+            <a:pPr algn="ctr"/>
+            <a:r>
+              <a:rPr lang="zh-CN" altLang="en-US" sz="1400">
                 <a:latin typeface="宋体" panose="02010600030101010101" pitchFamily="2" charset="-122"/>
                 <a:ea typeface="宋体" panose="02010600030101010101" pitchFamily="2" charset="-122"/>
-              </a:endParaRPr>
-            </a:p>
-            <a:p>
-              <a:pPr algn="ctr"/>
-              <a:r>
-                <a:rPr lang="en-US" altLang="zh-CN" sz="1400" b="1">
-                  <a:latin typeface="Times New Roman" panose="02020603050405020304" charset="0"/>
-                  <a:ea typeface="宋体" panose="02010600030101010101" pitchFamily="2" charset="-122"/>
-                  <a:cs typeface="Times New Roman" panose="02020603050405020304" charset="0"/>
-                </a:rPr>
-                <a:t>Spatio</a:t>
-              </a:r>
-              <a:r>
-                <a:rPr lang="en-US" altLang="zh-CN" sz="1400" b="1">
-                  <a:latin typeface="Times New Roman" panose="02020603050405020304" charset="0"/>
-                  <a:ea typeface="宋体" panose="02010600030101010101" pitchFamily="2" charset="-122"/>
-                  <a:cs typeface="Times New Roman" panose="02020603050405020304" charset="0"/>
-                </a:rPr>
-                <a:t> </a:t>
-              </a:r>
-              <a:endParaRPr lang="en-US" altLang="zh-CN" sz="1400" b="1">
+              </a:rPr>
+              <a:t>空间频率</a:t>
+            </a:r>
+            <a:r>
+              <a:rPr lang="en-US" altLang="zh-CN" sz="1400">
+                <a:latin typeface="宋体" panose="02010600030101010101" pitchFamily="2" charset="-122"/>
+                <a:ea typeface="宋体" panose="02010600030101010101" pitchFamily="2" charset="-122"/>
+              </a:rPr>
+              <a:t> </a:t>
+            </a:r>
+            <a:r>
+              <a:rPr lang="en-US" altLang="zh-CN" sz="1400">
                 <a:latin typeface="Times New Roman" panose="02020603050405020304" charset="0"/>
                 <a:ea typeface="宋体" panose="02010600030101010101" pitchFamily="2" charset="-122"/>
                 <a:cs typeface="Times New Roman" panose="02020603050405020304" charset="0"/>
-              </a:endParaRPr>
-            </a:p>
-          </p:txBody>
-        </p:sp>
-        <p:sp>
-          <p:nvSpPr>
-            <p:cNvPr id="8" name="圆角矩形 7"/>
-            <p:cNvSpPr/>
-            <p:nvPr/>
-          </p:nvSpPr>
-          <p:spPr>
-            <a:xfrm>
-              <a:off x="2481" y="5051"/>
-              <a:ext cx="2639" cy="721"/>
-            </a:xfrm>
-            <a:prstGeom prst="roundRect">
-              <a:avLst>
-                <a:gd name="adj" fmla="val 5430"/>
-              </a:avLst>
-            </a:prstGeom>
-            <a:noFill/>
-            <a:ln>
-              <a:solidFill>
-                <a:schemeClr val="tx1"/>
-              </a:solidFill>
-            </a:ln>
-            <a:extLst>
-              <a:ext uri="{909E8E84-426E-40DD-AFC4-6F175D3DCCD1}">
-                <a14:hiddenFill xmlns:a14="http://schemas.microsoft.com/office/drawing/2010/main">
-                  <a:solidFill>
-                    <a:srgbClr val="FBEDE0"/>
-                  </a:solidFill>
-                </a14:hiddenFill>
-              </a:ext>
-            </a:extLst>
-          </p:spPr>
-          <p:style>
-            <a:lnRef idx="2">
-              <a:schemeClr val="accent1"/>
-            </a:lnRef>
-            <a:fillRef idx="0">
-              <a:srgbClr val="FFFFFF"/>
-            </a:fillRef>
-            <a:effectRef idx="0">
-              <a:srgbClr val="FFFFFF"/>
-            </a:effectRef>
-            <a:fontRef idx="minor">
+              </a:rPr>
+              <a:t>Spatio </a:t>
+            </a:r>
+            <a:endParaRPr lang="en-US" altLang="zh-CN" sz="1400">
+              <a:latin typeface="Times New Roman" panose="02020603050405020304" charset="0"/>
+              <a:ea typeface="宋体" panose="02010600030101010101" pitchFamily="2" charset="-122"/>
+              <a:cs typeface="Times New Roman" panose="02020603050405020304" charset="0"/>
+            </a:endParaRPr>
+          </a:p>
+        </p:txBody>
+      </p:sp>
+      <p:sp>
+        <p:nvSpPr>
+          <p:cNvPr id="8" name="圆角矩形 7"/>
+          <p:cNvSpPr/>
+          <p:nvPr/>
+        </p:nvSpPr>
+        <p:spPr>
+          <a:xfrm>
+            <a:off x="333375" y="2849880"/>
+            <a:ext cx="2016000" cy="360000"/>
+          </a:xfrm>
+          <a:prstGeom prst="roundRect">
+            <a:avLst>
+              <a:gd name="adj" fmla="val 5430"/>
+            </a:avLst>
+          </a:prstGeom>
+          <a:noFill/>
+          <a:ln>
+            <a:solidFill>
               <a:schemeClr val="tx1"/>
-            </a:fontRef>
-          </p:style>
-          <p:txBody>
-            <a:bodyPr rtlCol="0" anchor="ctr"/>
-            <a:p>
-              <a:pPr algn="ctr"/>
-              <a:r>
-                <a:rPr lang="zh-CN" altLang="en-US" sz="1400" b="1">
-                  <a:latin typeface="宋体" panose="02010600030101010101" pitchFamily="2" charset="-122"/>
-                  <a:ea typeface="宋体" panose="02010600030101010101" pitchFamily="2" charset="-122"/>
-                </a:rPr>
-                <a:t>时间频率</a:t>
-              </a:r>
-              <a:r>
-                <a:rPr lang="en-US" altLang="zh-CN" sz="1400" b="1">
-                  <a:latin typeface="宋体" panose="02010600030101010101" pitchFamily="2" charset="-122"/>
-                  <a:ea typeface="宋体" panose="02010600030101010101" pitchFamily="2" charset="-122"/>
-                </a:rPr>
-                <a:t> </a:t>
-              </a:r>
-              <a:r>
-                <a:rPr lang="en-US" altLang="zh-CN" sz="1400" b="1">
-                  <a:latin typeface="Times New Roman" panose="02020603050405020304" charset="0"/>
-                  <a:ea typeface="宋体" panose="02010600030101010101" pitchFamily="2" charset="-122"/>
-                  <a:cs typeface="Times New Roman" panose="02020603050405020304" charset="0"/>
-                </a:rPr>
-                <a:t>Temporal </a:t>
-              </a:r>
-              <a:endParaRPr lang="en-US" altLang="zh-CN" sz="1400" b="1">
+            </a:solidFill>
+          </a:ln>
+          <a:extLst>
+            <a:ext uri="{909E8E84-426E-40DD-AFC4-6F175D3DCCD1}">
+              <a14:hiddenFill xmlns:a14="http://schemas.microsoft.com/office/drawing/2010/main">
+                <a:solidFill>
+                  <a:srgbClr val="FBEDE0"/>
+                </a:solidFill>
+              </a14:hiddenFill>
+            </a:ext>
+          </a:extLst>
+        </p:spPr>
+        <p:style>
+          <a:lnRef idx="2">
+            <a:schemeClr val="accent1"/>
+          </a:lnRef>
+          <a:fillRef idx="0">
+            <a:srgbClr val="FFFFFF"/>
+          </a:fillRef>
+          <a:effectRef idx="0">
+            <a:srgbClr val="FFFFFF"/>
+          </a:effectRef>
+          <a:fontRef idx="minor">
+            <a:schemeClr val="tx1"/>
+          </a:fontRef>
+        </p:style>
+        <p:txBody>
+          <a:bodyPr rtlCol="0" anchor="ctr"/>
+          <a:p>
+            <a:pPr algn="ctr"/>
+            <a:r>
+              <a:rPr lang="zh-CN" altLang="en-US" sz="1400">
+                <a:latin typeface="宋体" panose="02010600030101010101" pitchFamily="2" charset="-122"/>
+                <a:ea typeface="宋体" panose="02010600030101010101" pitchFamily="2" charset="-122"/>
+              </a:rPr>
+              <a:t>时间频率</a:t>
+            </a:r>
+            <a:r>
+              <a:rPr lang="en-US" altLang="zh-CN" sz="1400">
+                <a:latin typeface="宋体" panose="02010600030101010101" pitchFamily="2" charset="-122"/>
+                <a:ea typeface="宋体" panose="02010600030101010101" pitchFamily="2" charset="-122"/>
+              </a:rPr>
+              <a:t> </a:t>
+            </a:r>
+            <a:r>
+              <a:rPr lang="en-US" altLang="zh-CN" sz="1400">
                 <a:latin typeface="Times New Roman" panose="02020603050405020304" charset="0"/>
                 <a:ea typeface="宋体" panose="02010600030101010101" pitchFamily="2" charset="-122"/>
                 <a:cs typeface="Times New Roman" panose="02020603050405020304" charset="0"/>
-              </a:endParaRPr>
-            </a:p>
-          </p:txBody>
-        </p:sp>
-        <p:sp>
-          <p:nvSpPr>
-            <p:cNvPr id="9" name="圆角矩形 8"/>
-            <p:cNvSpPr/>
-            <p:nvPr/>
-          </p:nvSpPr>
-          <p:spPr>
-            <a:xfrm>
-              <a:off x="2481" y="6078"/>
-              <a:ext cx="2639" cy="721"/>
-            </a:xfrm>
-            <a:prstGeom prst="roundRect">
-              <a:avLst>
-                <a:gd name="adj" fmla="val 5430"/>
-              </a:avLst>
-            </a:prstGeom>
-            <a:noFill/>
-            <a:ln>
-              <a:solidFill>
-                <a:schemeClr val="tx1"/>
-              </a:solidFill>
-            </a:ln>
-            <a:extLst>
-              <a:ext uri="{909E8E84-426E-40DD-AFC4-6F175D3DCCD1}">
-                <a14:hiddenFill xmlns:a14="http://schemas.microsoft.com/office/drawing/2010/main">
-                  <a:solidFill>
-                    <a:srgbClr val="FBEDE0"/>
-                  </a:solidFill>
-                </a14:hiddenFill>
-              </a:ext>
-            </a:extLst>
-          </p:spPr>
-          <p:style>
-            <a:lnRef idx="2">
-              <a:schemeClr val="accent1"/>
-            </a:lnRef>
-            <a:fillRef idx="0">
-              <a:srgbClr val="FFFFFF"/>
-            </a:fillRef>
-            <a:effectRef idx="0">
-              <a:srgbClr val="FFFFFF"/>
-            </a:effectRef>
-            <a:fontRef idx="minor">
+              </a:rPr>
+              <a:t>Temporal </a:t>
+            </a:r>
+            <a:endParaRPr lang="en-US" altLang="zh-CN" sz="1400">
+              <a:latin typeface="Times New Roman" panose="02020603050405020304" charset="0"/>
+              <a:ea typeface="宋体" panose="02010600030101010101" pitchFamily="2" charset="-122"/>
+              <a:cs typeface="Times New Roman" panose="02020603050405020304" charset="0"/>
+            </a:endParaRPr>
+          </a:p>
+        </p:txBody>
+      </p:sp>
+      <p:sp>
+        <p:nvSpPr>
+          <p:cNvPr id="9" name="圆角矩形 8"/>
+          <p:cNvSpPr/>
+          <p:nvPr/>
+        </p:nvSpPr>
+        <p:spPr>
+          <a:xfrm>
+            <a:off x="333375" y="3387725"/>
+            <a:ext cx="2016000" cy="360000"/>
+          </a:xfrm>
+          <a:prstGeom prst="roundRect">
+            <a:avLst>
+              <a:gd name="adj" fmla="val 5430"/>
+            </a:avLst>
+          </a:prstGeom>
+          <a:noFill/>
+          <a:ln>
+            <a:solidFill>
               <a:schemeClr val="tx1"/>
-            </a:fontRef>
-          </p:style>
-          <p:txBody>
-            <a:bodyPr rtlCol="0" anchor="ctr"/>
-            <a:p>
-              <a:pPr algn="ctr"/>
-              <a:r>
-                <a:rPr lang="zh-CN" altLang="en-US" sz="1400" b="1">
-                  <a:latin typeface="宋体" panose="02010600030101010101" pitchFamily="2" charset="-122"/>
-                  <a:ea typeface="宋体" panose="02010600030101010101" pitchFamily="2" charset="-122"/>
-                </a:rPr>
-                <a:t>面积</a:t>
-              </a:r>
-              <a:r>
-                <a:rPr lang="en-US" altLang="zh-CN" sz="1400" b="1">
-                  <a:latin typeface="宋体" panose="02010600030101010101" pitchFamily="2" charset="-122"/>
-                  <a:ea typeface="宋体" panose="02010600030101010101" pitchFamily="2" charset="-122"/>
-                </a:rPr>
-                <a:t> </a:t>
-              </a:r>
-              <a:endParaRPr lang="en-US" altLang="zh-CN" sz="1400" b="1">
+            </a:solidFill>
+          </a:ln>
+          <a:extLst>
+            <a:ext uri="{909E8E84-426E-40DD-AFC4-6F175D3DCCD1}">
+              <a14:hiddenFill xmlns:a14="http://schemas.microsoft.com/office/drawing/2010/main">
+                <a:solidFill>
+                  <a:srgbClr val="FBEDE0"/>
+                </a:solidFill>
+              </a14:hiddenFill>
+            </a:ext>
+          </a:extLst>
+        </p:spPr>
+        <p:style>
+          <a:lnRef idx="2">
+            <a:schemeClr val="accent1"/>
+          </a:lnRef>
+          <a:fillRef idx="0">
+            <a:srgbClr val="FFFFFF"/>
+          </a:fillRef>
+          <a:effectRef idx="0">
+            <a:srgbClr val="FFFFFF"/>
+          </a:effectRef>
+          <a:fontRef idx="minor">
+            <a:schemeClr val="tx1"/>
+          </a:fontRef>
+        </p:style>
+        <p:txBody>
+          <a:bodyPr rtlCol="0" anchor="ctr"/>
+          <a:p>
+            <a:pPr algn="ctr"/>
+            <a:r>
+              <a:rPr lang="zh-CN" altLang="en-US" sz="1400">
                 <a:latin typeface="宋体" panose="02010600030101010101" pitchFamily="2" charset="-122"/>
                 <a:ea typeface="宋体" panose="02010600030101010101" pitchFamily="2" charset="-122"/>
-              </a:endParaRPr>
-            </a:p>
-            <a:p>
-              <a:pPr algn="ctr"/>
-              <a:r>
-                <a:rPr lang="en-US" altLang="zh-CN" sz="1400" b="1">
-                  <a:latin typeface="宋体" panose="02010600030101010101" pitchFamily="2" charset="-122"/>
-                  <a:ea typeface="宋体" panose="02010600030101010101" pitchFamily="2" charset="-122"/>
-                </a:rPr>
-                <a:t>Area</a:t>
-              </a:r>
-              <a:r>
-                <a:rPr lang="en-US" altLang="zh-CN" sz="1400" b="1">
-                  <a:latin typeface="宋体" panose="02010600030101010101" pitchFamily="2" charset="-122"/>
-                  <a:ea typeface="宋体" panose="02010600030101010101" pitchFamily="2" charset="-122"/>
-                  <a:cs typeface="Times New Roman" panose="02020603050405020304" charset="0"/>
-                </a:rPr>
-                <a:t> </a:t>
-              </a:r>
-              <a:endParaRPr lang="en-US" altLang="zh-CN" sz="1400" b="1">
+              </a:rPr>
+              <a:t>面积</a:t>
+            </a:r>
+            <a:r>
+              <a:rPr lang="en-US" altLang="zh-CN" sz="1400">
                 <a:latin typeface="宋体" panose="02010600030101010101" pitchFamily="2" charset="-122"/>
                 <a:ea typeface="宋体" panose="02010600030101010101" pitchFamily="2" charset="-122"/>
-                <a:cs typeface="Times New Roman" panose="02020603050405020304" charset="0"/>
-              </a:endParaRPr>
-            </a:p>
-          </p:txBody>
-        </p:sp>
-        <p:sp>
-          <p:nvSpPr>
-            <p:cNvPr id="10" name="圆角矩形 9"/>
-            <p:cNvSpPr/>
-            <p:nvPr/>
-          </p:nvSpPr>
-          <p:spPr>
-            <a:xfrm>
-              <a:off x="2481" y="7148"/>
-              <a:ext cx="2639" cy="721"/>
-            </a:xfrm>
-            <a:prstGeom prst="roundRect">
-              <a:avLst>
-                <a:gd name="adj" fmla="val 5430"/>
-              </a:avLst>
-            </a:prstGeom>
-            <a:noFill/>
-            <a:ln>
-              <a:solidFill>
-                <a:schemeClr val="tx1"/>
-              </a:solidFill>
-            </a:ln>
-            <a:extLst>
-              <a:ext uri="{909E8E84-426E-40DD-AFC4-6F175D3DCCD1}">
-                <a14:hiddenFill xmlns:a14="http://schemas.microsoft.com/office/drawing/2010/main">
-                  <a:solidFill>
-                    <a:srgbClr val="FBEDE0"/>
-                  </a:solidFill>
-                </a14:hiddenFill>
-              </a:ext>
-            </a:extLst>
-          </p:spPr>
-          <p:style>
-            <a:lnRef idx="2">
-              <a:schemeClr val="accent1"/>
-            </a:lnRef>
-            <a:fillRef idx="0">
-              <a:srgbClr val="FFFFFF"/>
-            </a:fillRef>
-            <a:effectRef idx="0">
-              <a:srgbClr val="FFFFFF"/>
-            </a:effectRef>
-            <a:fontRef idx="minor">
-              <a:schemeClr val="tx1"/>
-            </a:fontRef>
-          </p:style>
-          <p:txBody>
-            <a:bodyPr rtlCol="0" anchor="ctr"/>
-            <a:p>
-              <a:pPr algn="ctr"/>
-              <a:r>
-                <a:rPr lang="zh-CN" altLang="en-US" sz="1400" b="1">
-                  <a:latin typeface="宋体" panose="02010600030101010101" pitchFamily="2" charset="-122"/>
-                  <a:ea typeface="宋体" panose="02010600030101010101" pitchFamily="2" charset="-122"/>
-                </a:rPr>
-                <a:t>偏心度</a:t>
-              </a:r>
-              <a:r>
-                <a:rPr lang="en-US" altLang="zh-CN" sz="1400" b="1">
-                  <a:latin typeface="宋体" panose="02010600030101010101" pitchFamily="2" charset="-122"/>
-                  <a:ea typeface="宋体" panose="02010600030101010101" pitchFamily="2" charset="-122"/>
-                </a:rPr>
-                <a:t> </a:t>
-              </a:r>
-              <a:r>
-                <a:rPr lang="en-US" altLang="zh-CN" sz="1400" b="1">
-                  <a:latin typeface="Times New Roman" panose="02020603050405020304" charset="0"/>
-                  <a:ea typeface="宋体" panose="02010600030101010101" pitchFamily="2" charset="-122"/>
-                  <a:cs typeface="Times New Roman" panose="02020603050405020304" charset="0"/>
-                </a:rPr>
-                <a:t>Eccentricity </a:t>
-              </a:r>
-              <a:endParaRPr lang="en-US" altLang="zh-CN" sz="1400" b="1">
+              </a:rPr>
+              <a:t> </a:t>
+            </a:r>
+            <a:r>
+              <a:rPr lang="en-US" altLang="zh-CN" sz="1400">
                 <a:latin typeface="Times New Roman" panose="02020603050405020304" charset="0"/>
                 <a:ea typeface="宋体" panose="02010600030101010101" pitchFamily="2" charset="-122"/>
                 <a:cs typeface="Times New Roman" panose="02020603050405020304" charset="0"/>
-              </a:endParaRPr>
-            </a:p>
-          </p:txBody>
-        </p:sp>
-        <p:sp>
-          <p:nvSpPr>
-            <p:cNvPr id="11" name="圆角矩形 10"/>
-            <p:cNvSpPr/>
-            <p:nvPr/>
-          </p:nvSpPr>
-          <p:spPr>
-            <a:xfrm>
-              <a:off x="2481" y="8218"/>
-              <a:ext cx="2639" cy="795"/>
-            </a:xfrm>
-            <a:prstGeom prst="roundRect">
-              <a:avLst>
-                <a:gd name="adj" fmla="val 5430"/>
-              </a:avLst>
-            </a:prstGeom>
-            <a:noFill/>
-            <a:ln>
-              <a:solidFill>
-                <a:schemeClr val="tx1"/>
-              </a:solidFill>
-            </a:ln>
-            <a:extLst>
-              <a:ext uri="{909E8E84-426E-40DD-AFC4-6F175D3DCCD1}">
-                <a14:hiddenFill xmlns:a14="http://schemas.microsoft.com/office/drawing/2010/main">
-                  <a:solidFill>
-                    <a:srgbClr val="FBEDE0"/>
-                  </a:solidFill>
-                </a14:hiddenFill>
-              </a:ext>
-            </a:extLst>
-          </p:spPr>
-          <p:style>
-            <a:lnRef idx="2">
-              <a:schemeClr val="accent1"/>
-            </a:lnRef>
-            <a:fillRef idx="0">
-              <a:srgbClr val="FFFFFF"/>
-            </a:fillRef>
-            <a:effectRef idx="0">
-              <a:srgbClr val="FFFFFF"/>
-            </a:effectRef>
-            <a:fontRef idx="minor">
+              </a:rPr>
+              <a:t>Area </a:t>
+            </a:r>
+            <a:endParaRPr lang="en-US" altLang="zh-CN" sz="1400">
+              <a:latin typeface="Times New Roman" panose="02020603050405020304" charset="0"/>
+              <a:ea typeface="宋体" panose="02010600030101010101" pitchFamily="2" charset="-122"/>
+              <a:cs typeface="Times New Roman" panose="02020603050405020304" charset="0"/>
+            </a:endParaRPr>
+          </a:p>
+        </p:txBody>
+      </p:sp>
+      <p:sp>
+        <p:nvSpPr>
+          <p:cNvPr id="10" name="圆角矩形 9"/>
+          <p:cNvSpPr/>
+          <p:nvPr/>
+        </p:nvSpPr>
+        <p:spPr>
+          <a:xfrm>
+            <a:off x="334010" y="3952240"/>
+            <a:ext cx="2016000" cy="360000"/>
+          </a:xfrm>
+          <a:prstGeom prst="roundRect">
+            <a:avLst>
+              <a:gd name="adj" fmla="val 5430"/>
+            </a:avLst>
+          </a:prstGeom>
+          <a:noFill/>
+          <a:ln>
+            <a:solidFill>
               <a:schemeClr val="tx1"/>
-            </a:fontRef>
-          </p:style>
-          <p:txBody>
-            <a:bodyPr rtlCol="0" anchor="ctr"/>
-            <a:p>
-              <a:pPr algn="ctr"/>
-              <a:r>
-                <a:rPr lang="zh-CN" altLang="en-US" sz="1400" b="1">
-                  <a:latin typeface="宋体" panose="02010600030101010101" pitchFamily="2" charset="-122"/>
-                  <a:ea typeface="宋体" panose="02010600030101010101" pitchFamily="2" charset="-122"/>
-                </a:rPr>
-                <a:t>扫视时序特征</a:t>
-              </a:r>
-              <a:r>
-                <a:rPr lang="en-US" altLang="zh-CN" sz="1400" b="1">
-                  <a:latin typeface="宋体" panose="02010600030101010101" pitchFamily="2" charset="-122"/>
-                  <a:ea typeface="宋体" panose="02010600030101010101" pitchFamily="2" charset="-122"/>
-                </a:rPr>
-                <a:t> </a:t>
-              </a:r>
-              <a:endParaRPr lang="en-US" altLang="zh-CN" sz="1400" b="1">
+            </a:solidFill>
+          </a:ln>
+          <a:extLst>
+            <a:ext uri="{909E8E84-426E-40DD-AFC4-6F175D3DCCD1}">
+              <a14:hiddenFill xmlns:a14="http://schemas.microsoft.com/office/drawing/2010/main">
+                <a:solidFill>
+                  <a:srgbClr val="FBEDE0"/>
+                </a:solidFill>
+              </a14:hiddenFill>
+            </a:ext>
+          </a:extLst>
+        </p:spPr>
+        <p:style>
+          <a:lnRef idx="2">
+            <a:schemeClr val="accent1"/>
+          </a:lnRef>
+          <a:fillRef idx="0">
+            <a:srgbClr val="FFFFFF"/>
+          </a:fillRef>
+          <a:effectRef idx="0">
+            <a:srgbClr val="FFFFFF"/>
+          </a:effectRef>
+          <a:fontRef idx="minor">
+            <a:schemeClr val="tx1"/>
+          </a:fontRef>
+        </p:style>
+        <p:txBody>
+          <a:bodyPr rtlCol="0" anchor="ctr"/>
+          <a:p>
+            <a:pPr algn="ctr"/>
+            <a:r>
+              <a:rPr lang="zh-CN" altLang="en-US" sz="1400">
                 <a:latin typeface="宋体" panose="02010600030101010101" pitchFamily="2" charset="-122"/>
                 <a:ea typeface="宋体" panose="02010600030101010101" pitchFamily="2" charset="-122"/>
-              </a:endParaRPr>
-            </a:p>
-            <a:p>
-              <a:pPr algn="ctr"/>
-              <a:r>
-                <a:rPr lang="en-US" altLang="zh-CN" sz="1400" b="1">
-                  <a:latin typeface="Times New Roman" panose="02020603050405020304" charset="0"/>
-                  <a:ea typeface="宋体" panose="02010600030101010101" pitchFamily="2" charset="-122"/>
-                  <a:cs typeface="Times New Roman" panose="02020603050405020304" charset="0"/>
-                </a:rPr>
-                <a:t>temporal Saccade </a:t>
-              </a:r>
-              <a:endParaRPr lang="en-US" altLang="zh-CN" sz="1400" b="1">
+              </a:rPr>
+              <a:t>偏心度</a:t>
+            </a:r>
+            <a:r>
+              <a:rPr lang="en-US" altLang="zh-CN" sz="1400">
+                <a:latin typeface="宋体" panose="02010600030101010101" pitchFamily="2" charset="-122"/>
+                <a:ea typeface="宋体" panose="02010600030101010101" pitchFamily="2" charset="-122"/>
+              </a:rPr>
+              <a:t> </a:t>
+            </a:r>
+            <a:r>
+              <a:rPr lang="en-US" altLang="zh-CN" sz="1400">
                 <a:latin typeface="Times New Roman" panose="02020603050405020304" charset="0"/>
                 <a:ea typeface="宋体" panose="02010600030101010101" pitchFamily="2" charset="-122"/>
                 <a:cs typeface="Times New Roman" panose="02020603050405020304" charset="0"/>
-              </a:endParaRPr>
-            </a:p>
-          </p:txBody>
-        </p:sp>
-        <p:sp>
-          <p:nvSpPr>
-            <p:cNvPr id="15" name="圆角矩形 14"/>
-            <p:cNvSpPr/>
-            <p:nvPr/>
-          </p:nvSpPr>
-          <p:spPr>
-            <a:xfrm>
-              <a:off x="6577" y="4885"/>
-              <a:ext cx="2317" cy="938"/>
-            </a:xfrm>
-            <a:prstGeom prst="roundRect">
-              <a:avLst>
-                <a:gd name="adj" fmla="val 5430"/>
-              </a:avLst>
-            </a:prstGeom>
+              </a:rPr>
+              <a:t>Eccentricity </a:t>
+            </a:r>
+            <a:endParaRPr lang="en-US" altLang="zh-CN" sz="1400">
+              <a:latin typeface="Times New Roman" panose="02020603050405020304" charset="0"/>
+              <a:ea typeface="宋体" panose="02010600030101010101" pitchFamily="2" charset="-122"/>
+              <a:cs typeface="Times New Roman" panose="02020603050405020304" charset="0"/>
+            </a:endParaRPr>
+          </a:p>
+        </p:txBody>
+      </p:sp>
+      <p:sp>
+        <p:nvSpPr>
+          <p:cNvPr id="11" name="圆角矩形 10"/>
+          <p:cNvSpPr/>
+          <p:nvPr/>
+        </p:nvSpPr>
+        <p:spPr>
+          <a:xfrm>
+            <a:off x="218440" y="4772660"/>
+            <a:ext cx="2261235" cy="456565"/>
+          </a:xfrm>
+          <a:prstGeom prst="roundRect">
+            <a:avLst>
+              <a:gd name="adj" fmla="val 0"/>
+            </a:avLst>
+          </a:prstGeom>
+          <a:noFill/>
+          <a:ln>
             <a:solidFill>
-              <a:srgbClr val="FBEDE0"/>
+              <a:schemeClr val="tx1"/>
             </a:solidFill>
-            <a:ln>
-              <a:noFill/>
-            </a:ln>
-          </p:spPr>
-          <p:style>
-            <a:lnRef idx="2">
-              <a:schemeClr val="accent1"/>
-            </a:lnRef>
-            <a:fillRef idx="0">
-              <a:srgbClr val="FFFFFF"/>
-            </a:fillRef>
-            <a:effectRef idx="0">
-              <a:srgbClr val="FFFFFF"/>
-            </a:effectRef>
-            <a:fontRef idx="minor">
-              <a:schemeClr val="tx1"/>
-            </a:fontRef>
-          </p:style>
-          <p:txBody>
-            <a:bodyPr rtlCol="0" anchor="ctr"/>
-            <a:p>
-              <a:pPr algn="ctr"/>
-              <a:r>
-                <a:rPr lang="zh-CN" altLang="en-US" sz="1400" b="1">
-                  <a:latin typeface="宋体" panose="02010600030101010101" pitchFamily="2" charset="-122"/>
-                  <a:ea typeface="宋体" panose="02010600030101010101" pitchFamily="2" charset="-122"/>
-                </a:rPr>
-                <a:t>对比敏感度阈值</a:t>
-              </a:r>
-              <a:endParaRPr lang="zh-CN" altLang="en-US" sz="1400" b="1">
+          </a:ln>
+          <a:extLst>
+            <a:ext uri="{909E8E84-426E-40DD-AFC4-6F175D3DCCD1}">
+              <a14:hiddenFill xmlns:a14="http://schemas.microsoft.com/office/drawing/2010/main">
+                <a:solidFill>
+                  <a:srgbClr val="FBEDE0"/>
+                </a:solidFill>
+              </a14:hiddenFill>
+            </a:ext>
+          </a:extLst>
+        </p:spPr>
+        <p:style>
+          <a:lnRef idx="2">
+            <a:schemeClr val="accent1"/>
+          </a:lnRef>
+          <a:fillRef idx="0">
+            <a:srgbClr val="FFFFFF"/>
+          </a:fillRef>
+          <a:effectRef idx="0">
+            <a:srgbClr val="FFFFFF"/>
+          </a:effectRef>
+          <a:fontRef idx="minor">
+            <a:schemeClr val="tx1"/>
+          </a:fontRef>
+        </p:style>
+        <p:txBody>
+          <a:bodyPr rtlCol="0" anchor="ctr"/>
+          <a:p>
+            <a:pPr algn="ctr"/>
+            <a:r>
+              <a:rPr lang="zh-CN" altLang="en-US" sz="1400">
                 <a:latin typeface="宋体" panose="02010600030101010101" pitchFamily="2" charset="-122"/>
                 <a:ea typeface="宋体" panose="02010600030101010101" pitchFamily="2" charset="-122"/>
-              </a:endParaRPr>
-            </a:p>
-          </p:txBody>
-        </p:sp>
-        <p:cxnSp>
-          <p:nvCxnSpPr>
-            <p:cNvPr id="18" name="直接箭头连接符 17"/>
-            <p:cNvCxnSpPr/>
-            <p:nvPr/>
-          </p:nvCxnSpPr>
-          <p:spPr>
-            <a:xfrm>
-              <a:off x="5698" y="5366"/>
-              <a:ext cx="849" cy="11"/>
-            </a:xfrm>
-            <a:prstGeom prst="straightConnector1">
-              <a:avLst/>
-            </a:prstGeom>
-            <a:ln w="19050">
-              <a:solidFill>
-                <a:schemeClr val="tx1"/>
-              </a:solidFill>
-              <a:headEnd type="none"/>
-              <a:tailEnd type="triangle" w="med" len="med"/>
-            </a:ln>
-          </p:spPr>
-          <p:style>
-            <a:lnRef idx="2">
-              <a:schemeClr val="accent1"/>
-            </a:lnRef>
-            <a:fillRef idx="0">
-              <a:srgbClr val="FFFFFF"/>
-            </a:fillRef>
-            <a:effectRef idx="0">
-              <a:srgbClr val="FFFFFF"/>
-            </a:effectRef>
-            <a:fontRef idx="minor">
-              <a:schemeClr val="tx1"/>
-            </a:fontRef>
-          </p:style>
-        </p:cxnSp>
-        <p:cxnSp>
-          <p:nvCxnSpPr>
-            <p:cNvPr id="20" name="直接箭头连接符 19"/>
-            <p:cNvCxnSpPr/>
-            <p:nvPr/>
-          </p:nvCxnSpPr>
-          <p:spPr>
-            <a:xfrm flipV="1">
-              <a:off x="8904" y="5322"/>
-              <a:ext cx="824" cy="11"/>
-            </a:xfrm>
-            <a:prstGeom prst="straightConnector1">
-              <a:avLst/>
-            </a:prstGeom>
-            <a:ln w="19050">
-              <a:solidFill>
-                <a:schemeClr val="tx1"/>
-              </a:solidFill>
-              <a:headEnd type="none"/>
-              <a:tailEnd type="triangle" w="med" len="med"/>
-            </a:ln>
-          </p:spPr>
-          <p:style>
-            <a:lnRef idx="2">
-              <a:schemeClr val="accent1"/>
-            </a:lnRef>
-            <a:fillRef idx="0">
-              <a:srgbClr val="FFFFFF"/>
-            </a:fillRef>
-            <a:effectRef idx="0">
-              <a:srgbClr val="FFFFFF"/>
-            </a:effectRef>
-            <a:fontRef idx="minor">
-              <a:schemeClr val="tx1"/>
-            </a:fontRef>
-          </p:style>
-        </p:cxnSp>
-        <p:sp>
-          <p:nvSpPr>
-            <p:cNvPr id="21" name="圆角矩形 20"/>
-            <p:cNvSpPr/>
-            <p:nvPr/>
-          </p:nvSpPr>
-          <p:spPr>
-            <a:xfrm>
-              <a:off x="9743" y="4864"/>
-              <a:ext cx="2451" cy="938"/>
-            </a:xfrm>
-            <a:prstGeom prst="roundRect">
-              <a:avLst>
-                <a:gd name="adj" fmla="val 5430"/>
-              </a:avLst>
-            </a:prstGeom>
-            <a:solidFill>
-              <a:srgbClr val="FBEDE0"/>
-            </a:solidFill>
-            <a:ln>
-              <a:noFill/>
-            </a:ln>
-          </p:spPr>
-          <p:style>
-            <a:lnRef idx="2">
-              <a:schemeClr val="accent1"/>
-            </a:lnRef>
-            <a:fillRef idx="0">
-              <a:srgbClr val="FFFFFF"/>
-            </a:fillRef>
-            <a:effectRef idx="0">
-              <a:srgbClr val="FFFFFF"/>
-            </a:effectRef>
-            <a:fontRef idx="minor">
-              <a:schemeClr val="tx1"/>
-            </a:fontRef>
-          </p:style>
-          <p:txBody>
-            <a:bodyPr rtlCol="0" anchor="ctr"/>
-            <a:p>
-              <a:pPr algn="ctr"/>
-              <a:r>
-                <a:rPr lang="zh-CN" altLang="en-US" sz="1400" b="1">
-                  <a:latin typeface="宋体" panose="02010600030101010101" pitchFamily="2" charset="-122"/>
-                  <a:ea typeface="宋体" panose="02010600030101010101" pitchFamily="2" charset="-122"/>
-                </a:rPr>
-                <a:t>分辨率缩放因子</a:t>
-              </a:r>
-              <a:endParaRPr lang="zh-CN" altLang="en-US" sz="1400" b="1">
+              </a:rPr>
+              <a:t>扫视时序特征</a:t>
+            </a:r>
+            <a:r>
+              <a:rPr lang="en-US" altLang="zh-CN" sz="1400">
                 <a:latin typeface="宋体" panose="02010600030101010101" pitchFamily="2" charset="-122"/>
                 <a:ea typeface="宋体" panose="02010600030101010101" pitchFamily="2" charset="-122"/>
-              </a:endParaRPr>
-            </a:p>
-          </p:txBody>
-        </p:sp>
-        <p:sp>
-          <p:nvSpPr>
-            <p:cNvPr id="5" name="圆角矩形 4"/>
-            <p:cNvSpPr/>
-            <p:nvPr/>
-          </p:nvSpPr>
-          <p:spPr>
-            <a:xfrm>
-              <a:off x="13358" y="3086"/>
-              <a:ext cx="2676" cy="938"/>
-            </a:xfrm>
-            <a:prstGeom prst="roundRect">
-              <a:avLst>
-                <a:gd name="adj" fmla="val 5430"/>
-              </a:avLst>
-            </a:prstGeom>
-            <a:solidFill>
-              <a:srgbClr val="FBEDE0"/>
-            </a:solidFill>
-            <a:ln>
-              <a:noFill/>
-            </a:ln>
-          </p:spPr>
-          <p:style>
-            <a:lnRef idx="2">
-              <a:schemeClr val="accent1"/>
-            </a:lnRef>
-            <a:fillRef idx="0">
-              <a:srgbClr val="FFFFFF"/>
-            </a:fillRef>
-            <a:effectRef idx="0">
-              <a:srgbClr val="FFFFFF"/>
-            </a:effectRef>
-            <a:fontRef idx="minor">
-              <a:schemeClr val="tx1"/>
-            </a:fontRef>
-          </p:style>
-          <p:txBody>
-            <a:bodyPr rtlCol="0" anchor="ctr"/>
-            <a:p>
-              <a:pPr algn="ctr"/>
-              <a:r>
-                <a:rPr lang="zh-CN" altLang="en-US" sz="1400" b="1">
-                  <a:latin typeface="宋体" panose="02010600030101010101" pitchFamily="2" charset="-122"/>
-                  <a:ea typeface="宋体" panose="02010600030101010101" pitchFamily="2" charset="-122"/>
-                </a:rPr>
-                <a:t>扫视窗口</a:t>
-              </a:r>
-              <a:endParaRPr lang="zh-CN" altLang="en-US" sz="1400" b="1">
+              </a:rPr>
+              <a:t> </a:t>
+            </a:r>
+            <a:endParaRPr lang="en-US" altLang="zh-CN" sz="1400">
+              <a:latin typeface="宋体" panose="02010600030101010101" pitchFamily="2" charset="-122"/>
+              <a:ea typeface="宋体" panose="02010600030101010101" pitchFamily="2" charset="-122"/>
+            </a:endParaRPr>
+          </a:p>
+          <a:p>
+            <a:pPr algn="ctr"/>
+            <a:r>
+              <a:rPr lang="en-US" altLang="zh-CN" sz="1400">
+                <a:latin typeface="Times New Roman" panose="02020603050405020304" charset="0"/>
+                <a:ea typeface="宋体" panose="02010600030101010101" pitchFamily="2" charset="-122"/>
+                <a:cs typeface="Times New Roman" panose="02020603050405020304" charset="0"/>
+              </a:rPr>
+              <a:t>temporal Saccade </a:t>
+            </a:r>
+            <a:endParaRPr lang="en-US" altLang="zh-CN" sz="1400">
+              <a:latin typeface="Times New Roman" panose="02020603050405020304" charset="0"/>
+              <a:ea typeface="宋体" panose="02010600030101010101" pitchFamily="2" charset="-122"/>
+              <a:cs typeface="Times New Roman" panose="02020603050405020304" charset="0"/>
+            </a:endParaRPr>
+          </a:p>
+        </p:txBody>
+      </p:sp>
+      <p:sp>
+        <p:nvSpPr>
+          <p:cNvPr id="15" name="圆角矩形 14"/>
+          <p:cNvSpPr/>
+          <p:nvPr/>
+        </p:nvSpPr>
+        <p:spPr>
+          <a:xfrm>
+            <a:off x="3124835" y="2721610"/>
+            <a:ext cx="1471295" cy="595630"/>
+          </a:xfrm>
+          <a:prstGeom prst="roundRect">
+            <a:avLst>
+              <a:gd name="adj" fmla="val 5430"/>
+            </a:avLst>
+          </a:prstGeom>
+          <a:solidFill>
+            <a:srgbClr val="FBEDE0"/>
+          </a:solidFill>
+          <a:ln>
+            <a:noFill/>
+          </a:ln>
+        </p:spPr>
+        <p:style>
+          <a:lnRef idx="2">
+            <a:schemeClr val="accent1"/>
+          </a:lnRef>
+          <a:fillRef idx="0">
+            <a:srgbClr val="FFFFFF"/>
+          </a:fillRef>
+          <a:effectRef idx="0">
+            <a:srgbClr val="FFFFFF"/>
+          </a:effectRef>
+          <a:fontRef idx="minor">
+            <a:schemeClr val="tx1"/>
+          </a:fontRef>
+        </p:style>
+        <p:txBody>
+          <a:bodyPr rtlCol="0" anchor="ctr"/>
+          <a:p>
+            <a:pPr algn="ctr"/>
+            <a:r>
+              <a:rPr lang="zh-CN" altLang="en-US" sz="1400">
                 <a:latin typeface="宋体" panose="02010600030101010101" pitchFamily="2" charset="-122"/>
                 <a:ea typeface="宋体" panose="02010600030101010101" pitchFamily="2" charset="-122"/>
-              </a:endParaRPr>
-            </a:p>
-            <a:p>
-              <a:pPr algn="ctr"/>
-              <a:r>
-                <a:rPr lang="zh-CN" sz="1400" b="1">
-                  <a:latin typeface="宋体" panose="02010600030101010101" pitchFamily="2" charset="-122"/>
-                  <a:ea typeface="宋体" panose="02010600030101010101" pitchFamily="2" charset="-122"/>
-                  <a:sym typeface="+mn-ea"/>
-                </a:rPr>
-                <a:t>前瞻性激进降采样</a:t>
-              </a:r>
-              <a:endParaRPr lang="zh-CN" altLang="en-US" sz="1400" b="1">
+              </a:rPr>
+              <a:t>对比敏感度阈值</a:t>
+            </a:r>
+            <a:endParaRPr lang="zh-CN" altLang="en-US" sz="1400">
+              <a:latin typeface="宋体" panose="02010600030101010101" pitchFamily="2" charset="-122"/>
+              <a:ea typeface="宋体" panose="02010600030101010101" pitchFamily="2" charset="-122"/>
+            </a:endParaRPr>
+          </a:p>
+        </p:txBody>
+      </p:sp>
+      <p:cxnSp>
+        <p:nvCxnSpPr>
+          <p:cNvPr id="18" name="直接箭头连接符 17"/>
+          <p:cNvCxnSpPr/>
+          <p:nvPr/>
+        </p:nvCxnSpPr>
+        <p:spPr>
+          <a:xfrm>
+            <a:off x="2587625" y="3015615"/>
+            <a:ext cx="539115" cy="6985"/>
+          </a:xfrm>
+          <a:prstGeom prst="straightConnector1">
+            <a:avLst/>
+          </a:prstGeom>
+          <a:ln w="19050">
+            <a:solidFill>
+              <a:schemeClr val="tx1"/>
+            </a:solidFill>
+            <a:headEnd type="none"/>
+            <a:tailEnd type="triangle" w="med" len="med"/>
+          </a:ln>
+        </p:spPr>
+        <p:style>
+          <a:lnRef idx="2">
+            <a:schemeClr val="accent1"/>
+          </a:lnRef>
+          <a:fillRef idx="0">
+            <a:srgbClr val="FFFFFF"/>
+          </a:fillRef>
+          <a:effectRef idx="0">
+            <a:srgbClr val="FFFFFF"/>
+          </a:effectRef>
+          <a:fontRef idx="minor">
+            <a:schemeClr val="tx1"/>
+          </a:fontRef>
+        </p:style>
+      </p:cxnSp>
+      <p:cxnSp>
+        <p:nvCxnSpPr>
+          <p:cNvPr id="20" name="直接箭头连接符 19"/>
+          <p:cNvCxnSpPr/>
+          <p:nvPr/>
+        </p:nvCxnSpPr>
+        <p:spPr>
+          <a:xfrm flipV="1">
+            <a:off x="4602480" y="2999105"/>
+            <a:ext cx="523240" cy="6985"/>
+          </a:xfrm>
+          <a:prstGeom prst="straightConnector1">
+            <a:avLst/>
+          </a:prstGeom>
+          <a:ln w="19050">
+            <a:solidFill>
+              <a:schemeClr val="tx1"/>
+            </a:solidFill>
+            <a:headEnd type="none"/>
+            <a:tailEnd type="triangle" w="med" len="med"/>
+          </a:ln>
+        </p:spPr>
+        <p:style>
+          <a:lnRef idx="2">
+            <a:schemeClr val="accent1"/>
+          </a:lnRef>
+          <a:fillRef idx="0">
+            <a:srgbClr val="FFFFFF"/>
+          </a:fillRef>
+          <a:effectRef idx="0">
+            <a:srgbClr val="FFFFFF"/>
+          </a:effectRef>
+          <a:fontRef idx="minor">
+            <a:schemeClr val="tx1"/>
+          </a:fontRef>
+        </p:style>
+      </p:cxnSp>
+      <p:sp>
+        <p:nvSpPr>
+          <p:cNvPr id="21" name="圆角矩形 20"/>
+          <p:cNvSpPr/>
+          <p:nvPr/>
+        </p:nvSpPr>
+        <p:spPr>
+          <a:xfrm>
+            <a:off x="5135245" y="2708275"/>
+            <a:ext cx="1556385" cy="595630"/>
+          </a:xfrm>
+          <a:prstGeom prst="roundRect">
+            <a:avLst>
+              <a:gd name="adj" fmla="val 5430"/>
+            </a:avLst>
+          </a:prstGeom>
+          <a:solidFill>
+            <a:srgbClr val="FBEDE0"/>
+          </a:solidFill>
+          <a:ln>
+            <a:noFill/>
+          </a:ln>
+        </p:spPr>
+        <p:style>
+          <a:lnRef idx="2">
+            <a:schemeClr val="accent1"/>
+          </a:lnRef>
+          <a:fillRef idx="0">
+            <a:srgbClr val="FFFFFF"/>
+          </a:fillRef>
+          <a:effectRef idx="0">
+            <a:srgbClr val="FFFFFF"/>
+          </a:effectRef>
+          <a:fontRef idx="minor">
+            <a:schemeClr val="tx1"/>
+          </a:fontRef>
+        </p:style>
+        <p:txBody>
+          <a:bodyPr rtlCol="0" anchor="ctr"/>
+          <a:p>
+            <a:pPr algn="ctr"/>
+            <a:r>
+              <a:rPr lang="zh-CN" altLang="en-US" sz="1400">
                 <a:latin typeface="宋体" panose="02010600030101010101" pitchFamily="2" charset="-122"/>
                 <a:ea typeface="宋体" panose="02010600030101010101" pitchFamily="2" charset="-122"/>
-              </a:endParaRPr>
-            </a:p>
-          </p:txBody>
-        </p:sp>
-        <p:sp>
-          <p:nvSpPr>
-            <p:cNvPr id="12" name="圆角矩形 11"/>
-            <p:cNvSpPr/>
-            <p:nvPr/>
-          </p:nvSpPr>
-          <p:spPr>
-            <a:xfrm>
-              <a:off x="13328" y="4864"/>
-              <a:ext cx="2706" cy="908"/>
-            </a:xfrm>
-            <a:prstGeom prst="roundRect">
-              <a:avLst>
-                <a:gd name="adj" fmla="val 5430"/>
-              </a:avLst>
-            </a:prstGeom>
-            <a:solidFill>
-              <a:srgbClr val="FBEDE0"/>
-            </a:solidFill>
-            <a:ln>
-              <a:noFill/>
-            </a:ln>
-          </p:spPr>
-          <p:style>
-            <a:lnRef idx="2">
-              <a:schemeClr val="accent1"/>
-            </a:lnRef>
-            <a:fillRef idx="0">
-              <a:srgbClr val="FFFFFF"/>
-            </a:fillRef>
-            <a:effectRef idx="0">
-              <a:srgbClr val="FFFFFF"/>
-            </a:effectRef>
-            <a:fontRef idx="minor">
-              <a:schemeClr val="tx1"/>
-            </a:fontRef>
-          </p:style>
-          <p:txBody>
-            <a:bodyPr rtlCol="0" anchor="ctr"/>
-            <a:p>
-              <a:pPr algn="ctr"/>
-              <a:r>
-                <a:rPr lang="zh-CN" altLang="en-US" sz="1400" b="1">
-                  <a:latin typeface="宋体" panose="02010600030101010101" pitchFamily="2" charset="-122"/>
-                  <a:ea typeface="宋体" panose="02010600030101010101" pitchFamily="2" charset="-122"/>
-                </a:rPr>
-                <a:t>恢复窗口</a:t>
-              </a:r>
-              <a:endParaRPr lang="zh-CN" altLang="en-US" sz="1400" b="1">
+              </a:rPr>
+              <a:t>分辨率缩放因子</a:t>
+            </a:r>
+            <a:endParaRPr lang="zh-CN" altLang="en-US" sz="1400">
+              <a:latin typeface="宋体" panose="02010600030101010101" pitchFamily="2" charset="-122"/>
+              <a:ea typeface="宋体" panose="02010600030101010101" pitchFamily="2" charset="-122"/>
+            </a:endParaRPr>
+          </a:p>
+        </p:txBody>
+      </p:sp>
+      <p:sp>
+        <p:nvSpPr>
+          <p:cNvPr id="5" name="圆角矩形 4"/>
+          <p:cNvSpPr/>
+          <p:nvPr/>
+        </p:nvSpPr>
+        <p:spPr>
+          <a:xfrm>
+            <a:off x="7430770" y="1579245"/>
+            <a:ext cx="1699260" cy="595630"/>
+          </a:xfrm>
+          <a:prstGeom prst="roundRect">
+            <a:avLst>
+              <a:gd name="adj" fmla="val 5430"/>
+            </a:avLst>
+          </a:prstGeom>
+          <a:solidFill>
+            <a:srgbClr val="FBEDE0"/>
+          </a:solidFill>
+          <a:ln>
+            <a:noFill/>
+          </a:ln>
+        </p:spPr>
+        <p:style>
+          <a:lnRef idx="2">
+            <a:schemeClr val="accent1"/>
+          </a:lnRef>
+          <a:fillRef idx="0">
+            <a:srgbClr val="FFFFFF"/>
+          </a:fillRef>
+          <a:effectRef idx="0">
+            <a:srgbClr val="FFFFFF"/>
+          </a:effectRef>
+          <a:fontRef idx="minor">
+            <a:schemeClr val="tx1"/>
+          </a:fontRef>
+        </p:style>
+        <p:txBody>
+          <a:bodyPr rtlCol="0" anchor="ctr"/>
+          <a:p>
+            <a:pPr algn="ctr"/>
+            <a:r>
+              <a:rPr lang="zh-CN" altLang="en-US" sz="1400">
                 <a:latin typeface="宋体" panose="02010600030101010101" pitchFamily="2" charset="-122"/>
                 <a:ea typeface="宋体" panose="02010600030101010101" pitchFamily="2" charset="-122"/>
-              </a:endParaRPr>
-            </a:p>
-            <a:p>
-              <a:pPr algn="ctr"/>
-              <a:r>
-                <a:rPr lang="zh-CN" sz="1400" b="1">
-                  <a:latin typeface="宋体" panose="02010600030101010101" pitchFamily="2" charset="-122"/>
-                  <a:ea typeface="宋体" panose="02010600030101010101" pitchFamily="2" charset="-122"/>
-                  <a:sym typeface="+mn-ea"/>
-                </a:rPr>
-                <a:t>动态平滑恢复</a:t>
-              </a:r>
-              <a:endParaRPr lang="zh-CN" altLang="en-US" sz="1400" b="1">
+              </a:rPr>
+              <a:t>扫视窗口</a:t>
+            </a:r>
+            <a:endParaRPr lang="zh-CN" altLang="en-US" sz="1400">
+              <a:latin typeface="宋体" panose="02010600030101010101" pitchFamily="2" charset="-122"/>
+              <a:ea typeface="宋体" panose="02010600030101010101" pitchFamily="2" charset="-122"/>
+            </a:endParaRPr>
+          </a:p>
+          <a:p>
+            <a:pPr algn="ctr"/>
+            <a:r>
+              <a:rPr lang="zh-CN" sz="1400">
                 <a:latin typeface="宋体" panose="02010600030101010101" pitchFamily="2" charset="-122"/>
                 <a:ea typeface="宋体" panose="02010600030101010101" pitchFamily="2" charset="-122"/>
-              </a:endParaRPr>
-            </a:p>
-          </p:txBody>
-        </p:sp>
-        <p:sp>
-          <p:nvSpPr>
-            <p:cNvPr id="14" name="圆角矩形 13"/>
-            <p:cNvSpPr/>
-            <p:nvPr/>
-          </p:nvSpPr>
-          <p:spPr>
-            <a:xfrm>
-              <a:off x="13358" y="6646"/>
-              <a:ext cx="2676" cy="938"/>
-            </a:xfrm>
-            <a:prstGeom prst="roundRect">
-              <a:avLst>
-                <a:gd name="adj" fmla="val 5430"/>
-              </a:avLst>
-            </a:prstGeom>
-            <a:solidFill>
-              <a:srgbClr val="FBEDE0"/>
-            </a:solidFill>
-            <a:ln>
-              <a:noFill/>
-            </a:ln>
-          </p:spPr>
-          <p:style>
-            <a:lnRef idx="2">
-              <a:schemeClr val="accent1"/>
-            </a:lnRef>
-            <a:fillRef idx="0">
-              <a:srgbClr val="FFFFFF"/>
-            </a:fillRef>
-            <a:effectRef idx="0">
-              <a:srgbClr val="FFFFFF"/>
-            </a:effectRef>
-            <a:fontRef idx="minor">
-              <a:schemeClr val="tx1"/>
-            </a:fontRef>
-          </p:style>
-          <p:txBody>
-            <a:bodyPr rtlCol="0" anchor="ctr"/>
-            <a:p>
-              <a:pPr algn="ctr"/>
-              <a:r>
-                <a:rPr lang="zh-CN" altLang="en-US" sz="1400" b="1">
-                  <a:latin typeface="宋体" panose="02010600030101010101" pitchFamily="2" charset="-122"/>
-                  <a:ea typeface="宋体" panose="02010600030101010101" pitchFamily="2" charset="-122"/>
-                </a:rPr>
-                <a:t>稳定注视</a:t>
-              </a:r>
-              <a:endParaRPr lang="zh-CN" altLang="en-US" sz="1400" b="1">
+                <a:sym typeface="+mn-ea"/>
+              </a:rPr>
+              <a:t>前瞻性激进降采样</a:t>
+            </a:r>
+            <a:endParaRPr lang="zh-CN" altLang="en-US" sz="1400">
+              <a:latin typeface="宋体" panose="02010600030101010101" pitchFamily="2" charset="-122"/>
+              <a:ea typeface="宋体" panose="02010600030101010101" pitchFamily="2" charset="-122"/>
+            </a:endParaRPr>
+          </a:p>
+        </p:txBody>
+      </p:sp>
+      <p:sp>
+        <p:nvSpPr>
+          <p:cNvPr id="12" name="圆角矩形 11"/>
+          <p:cNvSpPr/>
+          <p:nvPr/>
+        </p:nvSpPr>
+        <p:spPr>
+          <a:xfrm>
+            <a:off x="7411720" y="2708275"/>
+            <a:ext cx="1718310" cy="576580"/>
+          </a:xfrm>
+          <a:prstGeom prst="roundRect">
+            <a:avLst>
+              <a:gd name="adj" fmla="val 5430"/>
+            </a:avLst>
+          </a:prstGeom>
+          <a:solidFill>
+            <a:srgbClr val="FBEDE0"/>
+          </a:solidFill>
+          <a:ln>
+            <a:noFill/>
+          </a:ln>
+        </p:spPr>
+        <p:style>
+          <a:lnRef idx="2">
+            <a:schemeClr val="accent1"/>
+          </a:lnRef>
+          <a:fillRef idx="0">
+            <a:srgbClr val="FFFFFF"/>
+          </a:fillRef>
+          <a:effectRef idx="0">
+            <a:srgbClr val="FFFFFF"/>
+          </a:effectRef>
+          <a:fontRef idx="minor">
+            <a:schemeClr val="tx1"/>
+          </a:fontRef>
+        </p:style>
+        <p:txBody>
+          <a:bodyPr rtlCol="0" anchor="ctr"/>
+          <a:p>
+            <a:pPr algn="ctr"/>
+            <a:r>
+              <a:rPr lang="zh-CN" altLang="en-US" sz="1400">
                 <a:latin typeface="宋体" panose="02010600030101010101" pitchFamily="2" charset="-122"/>
                 <a:ea typeface="宋体" panose="02010600030101010101" pitchFamily="2" charset="-122"/>
-              </a:endParaRPr>
-            </a:p>
-            <a:p>
-              <a:pPr algn="ctr"/>
-              <a:r>
-                <a:rPr lang="zh-CN" altLang="en-US" sz="1400" b="1">
-                  <a:latin typeface="宋体" panose="02010600030101010101" pitchFamily="2" charset="-122"/>
-                  <a:ea typeface="宋体" panose="02010600030101010101" pitchFamily="2" charset="-122"/>
-                </a:rPr>
-                <a:t>全分辨率渲染</a:t>
-              </a:r>
-              <a:endParaRPr lang="zh-CN" altLang="en-US" sz="1400" b="1">
+              </a:rPr>
+              <a:t>恢复窗口</a:t>
+            </a:r>
+            <a:endParaRPr lang="zh-CN" altLang="en-US" sz="1400">
+              <a:latin typeface="宋体" panose="02010600030101010101" pitchFamily="2" charset="-122"/>
+              <a:ea typeface="宋体" panose="02010600030101010101" pitchFamily="2" charset="-122"/>
+            </a:endParaRPr>
+          </a:p>
+          <a:p>
+            <a:pPr algn="ctr"/>
+            <a:r>
+              <a:rPr lang="zh-CN" sz="1400">
                 <a:latin typeface="宋体" panose="02010600030101010101" pitchFamily="2" charset="-122"/>
                 <a:ea typeface="宋体" panose="02010600030101010101" pitchFamily="2" charset="-122"/>
-              </a:endParaRPr>
-            </a:p>
-          </p:txBody>
-        </p:sp>
-        <p:cxnSp>
-          <p:nvCxnSpPr>
-            <p:cNvPr id="17" name="肘形连接符 16"/>
-            <p:cNvCxnSpPr>
-              <a:stCxn id="21" idx="3"/>
-              <a:endCxn id="5" idx="1"/>
-            </p:cNvCxnSpPr>
-            <p:nvPr/>
-          </p:nvCxnSpPr>
-          <p:spPr>
-            <a:xfrm flipV="1">
-              <a:off x="12194" y="3555"/>
-              <a:ext cx="1164" cy="1778"/>
-            </a:xfrm>
-            <a:prstGeom prst="bentConnector3">
-              <a:avLst>
-                <a:gd name="adj1" fmla="val 50000"/>
-              </a:avLst>
-            </a:prstGeom>
-            <a:ln w="19050">
-              <a:solidFill>
-                <a:schemeClr val="tx1"/>
-              </a:solidFill>
-              <a:headEnd type="none"/>
-              <a:tailEnd type="triangle" w="med" len="med"/>
-            </a:ln>
-          </p:spPr>
-          <p:style>
-            <a:lnRef idx="2">
-              <a:schemeClr val="accent1"/>
-            </a:lnRef>
-            <a:fillRef idx="0">
-              <a:srgbClr val="FFFFFF"/>
-            </a:fillRef>
-            <a:effectRef idx="0">
-              <a:srgbClr val="FFFFFF"/>
-            </a:effectRef>
-            <a:fontRef idx="minor">
+                <a:sym typeface="+mn-ea"/>
+              </a:rPr>
+              <a:t>动态平滑恢复</a:t>
+            </a:r>
+            <a:endParaRPr lang="zh-CN" altLang="en-US" sz="1400">
+              <a:latin typeface="宋体" panose="02010600030101010101" pitchFamily="2" charset="-122"/>
+              <a:ea typeface="宋体" panose="02010600030101010101" pitchFamily="2" charset="-122"/>
+            </a:endParaRPr>
+          </a:p>
+        </p:txBody>
+      </p:sp>
+      <p:sp>
+        <p:nvSpPr>
+          <p:cNvPr id="14" name="圆角矩形 13"/>
+          <p:cNvSpPr/>
+          <p:nvPr/>
+        </p:nvSpPr>
+        <p:spPr>
+          <a:xfrm>
+            <a:off x="7430770" y="3839845"/>
+            <a:ext cx="1699260" cy="595630"/>
+          </a:xfrm>
+          <a:prstGeom prst="roundRect">
+            <a:avLst>
+              <a:gd name="adj" fmla="val 5430"/>
+            </a:avLst>
+          </a:prstGeom>
+          <a:solidFill>
+            <a:srgbClr val="FBEDE0"/>
+          </a:solidFill>
+          <a:ln>
+            <a:noFill/>
+          </a:ln>
+        </p:spPr>
+        <p:style>
+          <a:lnRef idx="2">
+            <a:schemeClr val="accent1"/>
+          </a:lnRef>
+          <a:fillRef idx="0">
+            <a:srgbClr val="FFFFFF"/>
+          </a:fillRef>
+          <a:effectRef idx="0">
+            <a:srgbClr val="FFFFFF"/>
+          </a:effectRef>
+          <a:fontRef idx="minor">
+            <a:schemeClr val="tx1"/>
+          </a:fontRef>
+        </p:style>
+        <p:txBody>
+          <a:bodyPr rtlCol="0" anchor="ctr"/>
+          <a:p>
+            <a:pPr algn="ctr"/>
+            <a:r>
+              <a:rPr lang="zh-CN" altLang="en-US" sz="1400">
+                <a:latin typeface="宋体" panose="02010600030101010101" pitchFamily="2" charset="-122"/>
+                <a:ea typeface="宋体" panose="02010600030101010101" pitchFamily="2" charset="-122"/>
+              </a:rPr>
+              <a:t>稳定注视</a:t>
+            </a:r>
+            <a:endParaRPr lang="zh-CN" altLang="en-US" sz="1400">
+              <a:latin typeface="宋体" panose="02010600030101010101" pitchFamily="2" charset="-122"/>
+              <a:ea typeface="宋体" panose="02010600030101010101" pitchFamily="2" charset="-122"/>
+            </a:endParaRPr>
+          </a:p>
+          <a:p>
+            <a:pPr algn="ctr"/>
+            <a:r>
+              <a:rPr lang="zh-CN" altLang="en-US" sz="1400">
+                <a:latin typeface="宋体" panose="02010600030101010101" pitchFamily="2" charset="-122"/>
+                <a:ea typeface="宋体" panose="02010600030101010101" pitchFamily="2" charset="-122"/>
+              </a:rPr>
+              <a:t>全分辨率渲染</a:t>
+            </a:r>
+            <a:endParaRPr lang="zh-CN" altLang="en-US" sz="1400">
+              <a:latin typeface="宋体" panose="02010600030101010101" pitchFamily="2" charset="-122"/>
+              <a:ea typeface="宋体" panose="02010600030101010101" pitchFamily="2" charset="-122"/>
+            </a:endParaRPr>
+          </a:p>
+        </p:txBody>
+      </p:sp>
+      <p:cxnSp>
+        <p:nvCxnSpPr>
+          <p:cNvPr id="17" name="肘形连接符 16"/>
+          <p:cNvCxnSpPr>
+            <a:stCxn id="21" idx="3"/>
+            <a:endCxn id="5" idx="1"/>
+          </p:cNvCxnSpPr>
+          <p:nvPr/>
+        </p:nvCxnSpPr>
+        <p:spPr>
+          <a:xfrm flipV="1">
+            <a:off x="6691630" y="1877060"/>
+            <a:ext cx="739140" cy="1129030"/>
+          </a:xfrm>
+          <a:prstGeom prst="bentConnector3">
+            <a:avLst>
+              <a:gd name="adj1" fmla="val 50000"/>
+            </a:avLst>
+          </a:prstGeom>
+          <a:ln w="19050">
+            <a:solidFill>
               <a:schemeClr val="tx1"/>
-            </a:fontRef>
-          </p:style>
-        </p:cxnSp>
-        <p:cxnSp>
-          <p:nvCxnSpPr>
-            <p:cNvPr id="27" name="肘形连接符 26"/>
-            <p:cNvCxnSpPr/>
-            <p:nvPr/>
-          </p:nvCxnSpPr>
-          <p:spPr>
-            <a:xfrm flipV="1">
-              <a:off x="12194" y="5333"/>
-              <a:ext cx="1134" cy="15"/>
-            </a:xfrm>
-            <a:prstGeom prst="bentConnector3">
-              <a:avLst>
-                <a:gd name="adj1" fmla="val 50000"/>
-              </a:avLst>
-            </a:prstGeom>
-            <a:ln w="19050">
-              <a:solidFill>
-                <a:schemeClr val="tx1"/>
-              </a:solidFill>
-              <a:headEnd type="none"/>
-              <a:tailEnd type="triangle" w="med" len="med"/>
-            </a:ln>
-          </p:spPr>
-          <p:style>
-            <a:lnRef idx="2">
-              <a:schemeClr val="accent1"/>
-            </a:lnRef>
-            <a:fillRef idx="0">
-              <a:srgbClr val="FFFFFF"/>
-            </a:fillRef>
-            <a:effectRef idx="0">
-              <a:srgbClr val="FFFFFF"/>
-            </a:effectRef>
-            <a:fontRef idx="minor">
+            </a:solidFill>
+            <a:headEnd type="none"/>
+            <a:tailEnd type="triangle" w="med" len="med"/>
+          </a:ln>
+        </p:spPr>
+        <p:style>
+          <a:lnRef idx="2">
+            <a:schemeClr val="accent1"/>
+          </a:lnRef>
+          <a:fillRef idx="0">
+            <a:srgbClr val="FFFFFF"/>
+          </a:fillRef>
+          <a:effectRef idx="0">
+            <a:srgbClr val="FFFFFF"/>
+          </a:effectRef>
+          <a:fontRef idx="minor">
+            <a:schemeClr val="tx1"/>
+          </a:fontRef>
+        </p:style>
+      </p:cxnSp>
+      <p:cxnSp>
+        <p:nvCxnSpPr>
+          <p:cNvPr id="27" name="肘形连接符 26"/>
+          <p:cNvCxnSpPr/>
+          <p:nvPr/>
+        </p:nvCxnSpPr>
+        <p:spPr>
+          <a:xfrm flipV="1">
+            <a:off x="6691630" y="3006090"/>
+            <a:ext cx="720090" cy="9525"/>
+          </a:xfrm>
+          <a:prstGeom prst="bentConnector3">
+            <a:avLst>
+              <a:gd name="adj1" fmla="val 50000"/>
+            </a:avLst>
+          </a:prstGeom>
+          <a:ln w="19050">
+            <a:solidFill>
               <a:schemeClr val="tx1"/>
-            </a:fontRef>
-          </p:style>
-        </p:cxnSp>
-        <p:cxnSp>
-          <p:nvCxnSpPr>
-            <p:cNvPr id="31" name="肘形连接符 30"/>
-            <p:cNvCxnSpPr>
-              <a:stCxn id="21" idx="3"/>
-              <a:endCxn id="14" idx="1"/>
-            </p:cNvCxnSpPr>
-            <p:nvPr/>
-          </p:nvCxnSpPr>
-          <p:spPr>
-            <a:xfrm>
-              <a:off x="12194" y="5333"/>
-              <a:ext cx="1164" cy="1782"/>
-            </a:xfrm>
-            <a:prstGeom prst="bentConnector3">
-              <a:avLst>
-                <a:gd name="adj1" fmla="val 50000"/>
-              </a:avLst>
-            </a:prstGeom>
-            <a:ln w="19050">
-              <a:solidFill>
-                <a:schemeClr val="tx1"/>
-              </a:solidFill>
-              <a:headEnd type="none"/>
-              <a:tailEnd type="triangle" w="med" len="med"/>
-            </a:ln>
-          </p:spPr>
-          <p:style>
-            <a:lnRef idx="2">
-              <a:schemeClr val="accent1"/>
-            </a:lnRef>
-            <a:fillRef idx="0">
-              <a:srgbClr val="FFFFFF"/>
-            </a:fillRef>
-            <a:effectRef idx="0">
-              <a:srgbClr val="FFFFFF"/>
-            </a:effectRef>
-            <a:fontRef idx="minor">
+            </a:solidFill>
+            <a:headEnd type="none"/>
+            <a:tailEnd type="triangle" w="med" len="med"/>
+          </a:ln>
+        </p:spPr>
+        <p:style>
+          <a:lnRef idx="2">
+            <a:schemeClr val="accent1"/>
+          </a:lnRef>
+          <a:fillRef idx="0">
+            <a:srgbClr val="FFFFFF"/>
+          </a:fillRef>
+          <a:effectRef idx="0">
+            <a:srgbClr val="FFFFFF"/>
+          </a:effectRef>
+          <a:fontRef idx="minor">
+            <a:schemeClr val="tx1"/>
+          </a:fontRef>
+        </p:style>
+      </p:cxnSp>
+      <p:cxnSp>
+        <p:nvCxnSpPr>
+          <p:cNvPr id="31" name="肘形连接符 30"/>
+          <p:cNvCxnSpPr>
+            <a:stCxn id="21" idx="3"/>
+            <a:endCxn id="14" idx="1"/>
+          </p:cNvCxnSpPr>
+          <p:nvPr/>
+        </p:nvCxnSpPr>
+        <p:spPr>
+          <a:xfrm>
+            <a:off x="6691630" y="3006090"/>
+            <a:ext cx="739140" cy="1131570"/>
+          </a:xfrm>
+          <a:prstGeom prst="bentConnector3">
+            <a:avLst>
+              <a:gd name="adj1" fmla="val 50000"/>
+            </a:avLst>
+          </a:prstGeom>
+          <a:ln w="19050">
+            <a:solidFill>
               <a:schemeClr val="tx1"/>
-            </a:fontRef>
-          </p:style>
-        </p:cxnSp>
-      </p:grpSp>
+            </a:solidFill>
+            <a:headEnd type="none"/>
+            <a:tailEnd type="triangle" w="med" len="med"/>
+          </a:ln>
+        </p:spPr>
+        <p:style>
+          <a:lnRef idx="2">
+            <a:schemeClr val="accent1"/>
+          </a:lnRef>
+          <a:fillRef idx="0">
+            <a:srgbClr val="FFFFFF"/>
+          </a:fillRef>
+          <a:effectRef idx="0">
+            <a:srgbClr val="FFFFFF"/>
+          </a:effectRef>
+          <a:fontRef idx="minor">
+            <a:schemeClr val="tx1"/>
+          </a:fontRef>
+        </p:style>
+      </p:cxnSp>
+      <p:sp>
+        <p:nvSpPr>
+          <p:cNvPr id="2" name="矩形 1"/>
+          <p:cNvSpPr/>
+          <p:nvPr/>
+        </p:nvSpPr>
+        <p:spPr>
+          <a:xfrm>
+            <a:off x="218440" y="1038860"/>
+            <a:ext cx="2261235" cy="3404870"/>
+          </a:xfrm>
+          <a:prstGeom prst="rect">
+            <a:avLst/>
+          </a:prstGeom>
+          <a:ln w="12700">
+            <a:solidFill>
+              <a:schemeClr val="tx1"/>
+            </a:solidFill>
+          </a:ln>
+        </p:spPr>
+        <p:style>
+          <a:lnRef idx="2">
+            <a:schemeClr val="accent1"/>
+          </a:lnRef>
+          <a:fillRef idx="0">
+            <a:srgbClr val="FFFFFF"/>
+          </a:fillRef>
+          <a:effectRef idx="0">
+            <a:srgbClr val="FFFFFF"/>
+          </a:effectRef>
+          <a:fontRef idx="minor">
+            <a:schemeClr val="tx1"/>
+          </a:fontRef>
+        </p:style>
+        <p:txBody>
+          <a:bodyPr rtlCol="0" anchor="ctr"/>
+          <a:p>
+            <a:pPr algn="ctr"/>
+            <a:endParaRPr lang="zh-CN" altLang="en-US"/>
+          </a:p>
+        </p:txBody>
+      </p:sp>
+      <p:cxnSp>
+        <p:nvCxnSpPr>
+          <p:cNvPr id="22" name="直接箭头连接符 21"/>
+          <p:cNvCxnSpPr/>
+          <p:nvPr/>
+        </p:nvCxnSpPr>
+        <p:spPr>
+          <a:xfrm flipV="1">
+            <a:off x="1391285" y="4443730"/>
+            <a:ext cx="3810" cy="337185"/>
+          </a:xfrm>
+          <a:prstGeom prst="straightConnector1">
+            <a:avLst/>
+          </a:prstGeom>
+          <a:ln w="19050">
+            <a:solidFill>
+              <a:schemeClr val="tx1"/>
+            </a:solidFill>
+            <a:headEnd type="none"/>
+            <a:tailEnd type="triangle" w="med" len="med"/>
+          </a:ln>
+        </p:spPr>
+        <p:style>
+          <a:lnRef idx="2">
+            <a:schemeClr val="accent1"/>
+          </a:lnRef>
+          <a:fillRef idx="0">
+            <a:srgbClr val="FFFFFF"/>
+          </a:fillRef>
+          <a:effectRef idx="0">
+            <a:srgbClr val="FFFFFF"/>
+          </a:effectRef>
+          <a:fontRef idx="minor">
+            <a:schemeClr val="tx1"/>
+          </a:fontRef>
+        </p:style>
+      </p:cxnSp>
     </p:spTree>
   </p:cSld>
   <p:clrMapOvr>
